--- a/Präsentation/Power Point presentation.pptx
+++ b/Präsentation/Power Point presentation.pptx
@@ -270,7 +270,7 @@
           <a:p>
             <a:fld id="{7680D0E4-B194-4342-99B8-E890CA729E74}" type="datetimeFigureOut">
               <a:rPr lang="x-none" smtClean="0"/>
-              <a:t>11.05.2021</a:t>
+              <a:t>07.06.2021</a:t>
             </a:fld>
             <a:endParaRPr lang="x-none"/>
           </a:p>
@@ -1851,6 +1851,214 @@
   <p:clrMapOvr>
     <a:masterClrMapping/>
   </p:clrMapOvr>
+  <p:timing>
+    <p:tnLst>
+      <p:par>
+        <p:cTn id="1" dur="indefinite" restart="never" nodeType="tmRoot">
+          <p:childTnLst>
+            <p:seq concurrent="1" nextAc="seek">
+              <p:cTn id="2" dur="indefinite" nodeType="mainSeq">
+                <p:childTnLst>
+                  <p:par>
+                    <p:cTn id="3" fill="hold">
+                      <p:stCondLst>
+                        <p:cond delay="indefinite"/>
+                      </p:stCondLst>
+                      <p:childTnLst>
+                        <p:par>
+                          <p:cTn id="4" fill="hold">
+                            <p:stCondLst>
+                              <p:cond delay="0"/>
+                            </p:stCondLst>
+                            <p:childTnLst>
+                              <p:par>
+                                <p:cTn id="5" presetID="1" presetClass="entr" presetSubtype="0" fill="hold" grpId="0" nodeType="clickEffect">
+                                  <p:stCondLst>
+                                    <p:cond delay="0"/>
+                                  </p:stCondLst>
+                                  <p:childTnLst>
+                                    <p:set>
+                                      <p:cBhvr>
+                                        <p:cTn id="6" dur="1" fill="hold">
+                                          <p:stCondLst>
+                                            <p:cond delay="0"/>
+                                          </p:stCondLst>
+                                        </p:cTn>
+                                        <p:tgtEl>
+                                          <p:spTgt spid="2"/>
+                                        </p:tgtEl>
+                                        <p:attrNameLst>
+                                          <p:attrName>style.visibility</p:attrName>
+                                        </p:attrNameLst>
+                                      </p:cBhvr>
+                                      <p:to>
+                                        <p:strVal val="visible"/>
+                                      </p:to>
+                                    </p:set>
+                                  </p:childTnLst>
+                                </p:cTn>
+                              </p:par>
+                            </p:childTnLst>
+                          </p:cTn>
+                        </p:par>
+                      </p:childTnLst>
+                    </p:cTn>
+                  </p:par>
+                  <p:par>
+                    <p:cTn id="7" fill="hold">
+                      <p:stCondLst>
+                        <p:cond delay="indefinite"/>
+                      </p:stCondLst>
+                      <p:childTnLst>
+                        <p:par>
+                          <p:cTn id="8" fill="hold">
+                            <p:stCondLst>
+                              <p:cond delay="0"/>
+                            </p:stCondLst>
+                            <p:childTnLst>
+                              <p:par>
+                                <p:cTn id="9" presetID="1" presetClass="entr" presetSubtype="0" fill="hold" grpId="0" nodeType="clickEffect">
+                                  <p:stCondLst>
+                                    <p:cond delay="0"/>
+                                  </p:stCondLst>
+                                  <p:childTnLst>
+                                    <p:set>
+                                      <p:cBhvr>
+                                        <p:cTn id="10" dur="1" fill="hold">
+                                          <p:stCondLst>
+                                            <p:cond delay="0"/>
+                                          </p:stCondLst>
+                                        </p:cTn>
+                                        <p:tgtEl>
+                                          <p:spTgt spid="3">
+                                            <p:txEl>
+                                              <p:pRg st="0" end="0"/>
+                                            </p:txEl>
+                                          </p:spTgt>
+                                        </p:tgtEl>
+                                        <p:attrNameLst>
+                                          <p:attrName>style.visibility</p:attrName>
+                                        </p:attrNameLst>
+                                      </p:cBhvr>
+                                      <p:to>
+                                        <p:strVal val="visible"/>
+                                      </p:to>
+                                    </p:set>
+                                  </p:childTnLst>
+                                </p:cTn>
+                              </p:par>
+                            </p:childTnLst>
+                          </p:cTn>
+                        </p:par>
+                        <p:par>
+                          <p:cTn id="11" fill="hold">
+                            <p:stCondLst>
+                              <p:cond delay="0"/>
+                            </p:stCondLst>
+                            <p:childTnLst>
+                              <p:par>
+                                <p:cTn id="12" presetID="1" presetClass="entr" presetSubtype="0" fill="hold" grpId="0" nodeType="afterEffect">
+                                  <p:stCondLst>
+                                    <p:cond delay="0"/>
+                                  </p:stCondLst>
+                                  <p:childTnLst>
+                                    <p:set>
+                                      <p:cBhvr>
+                                        <p:cTn id="13" dur="1" fill="hold">
+                                          <p:stCondLst>
+                                            <p:cond delay="0"/>
+                                          </p:stCondLst>
+                                        </p:cTn>
+                                        <p:tgtEl>
+                                          <p:spTgt spid="3">
+                                            <p:txEl>
+                                              <p:pRg st="1" end="1"/>
+                                            </p:txEl>
+                                          </p:spTgt>
+                                        </p:tgtEl>
+                                        <p:attrNameLst>
+                                          <p:attrName>style.visibility</p:attrName>
+                                        </p:attrNameLst>
+                                      </p:cBhvr>
+                                      <p:to>
+                                        <p:strVal val="visible"/>
+                                      </p:to>
+                                    </p:set>
+                                  </p:childTnLst>
+                                </p:cTn>
+                              </p:par>
+                            </p:childTnLst>
+                          </p:cTn>
+                        </p:par>
+                        <p:par>
+                          <p:cTn id="14" fill="hold">
+                            <p:stCondLst>
+                              <p:cond delay="0"/>
+                            </p:stCondLst>
+                            <p:childTnLst>
+                              <p:par>
+                                <p:cTn id="15" presetID="1" presetClass="entr" presetSubtype="0" fill="hold" grpId="0" nodeType="afterEffect">
+                                  <p:stCondLst>
+                                    <p:cond delay="0"/>
+                                  </p:stCondLst>
+                                  <p:childTnLst>
+                                    <p:set>
+                                      <p:cBhvr>
+                                        <p:cTn id="16" dur="1" fill="hold">
+                                          <p:stCondLst>
+                                            <p:cond delay="0"/>
+                                          </p:stCondLst>
+                                        </p:cTn>
+                                        <p:tgtEl>
+                                          <p:spTgt spid="3">
+                                            <p:txEl>
+                                              <p:pRg st="2" end="2"/>
+                                            </p:txEl>
+                                          </p:spTgt>
+                                        </p:tgtEl>
+                                        <p:attrNameLst>
+                                          <p:attrName>style.visibility</p:attrName>
+                                        </p:attrNameLst>
+                                      </p:cBhvr>
+                                      <p:to>
+                                        <p:strVal val="visible"/>
+                                      </p:to>
+                                    </p:set>
+                                  </p:childTnLst>
+                                </p:cTn>
+                              </p:par>
+                            </p:childTnLst>
+                          </p:cTn>
+                        </p:par>
+                      </p:childTnLst>
+                    </p:cTn>
+                  </p:par>
+                </p:childTnLst>
+              </p:cTn>
+              <p:prevCondLst>
+                <p:cond evt="onPrev" delay="0">
+                  <p:tgtEl>
+                    <p:sldTgt/>
+                  </p:tgtEl>
+                </p:cond>
+              </p:prevCondLst>
+              <p:nextCondLst>
+                <p:cond evt="onNext" delay="0">
+                  <p:tgtEl>
+                    <p:sldTgt/>
+                  </p:tgtEl>
+                </p:cond>
+              </p:nextCondLst>
+            </p:seq>
+          </p:childTnLst>
+        </p:cTn>
+      </p:par>
+    </p:tnLst>
+    <p:bldLst>
+      <p:bldP spid="2" grpId="0"/>
+      <p:bldP spid="3" grpId="0" uiExpand="1" build="p"/>
+    </p:bldLst>
+  </p:timing>
 </p:sld>
 </file>
 
@@ -2021,6 +2229,241 @@
   <p:clrMapOvr>
     <a:masterClrMapping/>
   </p:clrMapOvr>
+  <p:timing>
+    <p:tnLst>
+      <p:par>
+        <p:cTn id="1" dur="indefinite" restart="never" nodeType="tmRoot">
+          <p:childTnLst>
+            <p:seq concurrent="1" nextAc="seek">
+              <p:cTn id="2" dur="indefinite" nodeType="mainSeq">
+                <p:childTnLst>
+                  <p:par>
+                    <p:cTn id="3" fill="hold">
+                      <p:stCondLst>
+                        <p:cond delay="indefinite"/>
+                      </p:stCondLst>
+                      <p:childTnLst>
+                        <p:par>
+                          <p:cTn id="4" fill="hold">
+                            <p:stCondLst>
+                              <p:cond delay="0"/>
+                            </p:stCondLst>
+                            <p:childTnLst>
+                              <p:par>
+                                <p:cTn id="5" presetID="1" presetClass="entr" presetSubtype="0" fill="hold" grpId="0" nodeType="clickEffect">
+                                  <p:stCondLst>
+                                    <p:cond delay="0"/>
+                                  </p:stCondLst>
+                                  <p:childTnLst>
+                                    <p:set>
+                                      <p:cBhvr>
+                                        <p:cTn id="6" dur="1" fill="hold">
+                                          <p:stCondLst>
+                                            <p:cond delay="0"/>
+                                          </p:stCondLst>
+                                        </p:cTn>
+                                        <p:tgtEl>
+                                          <p:spTgt spid="2"/>
+                                        </p:tgtEl>
+                                        <p:attrNameLst>
+                                          <p:attrName>style.visibility</p:attrName>
+                                        </p:attrNameLst>
+                                      </p:cBhvr>
+                                      <p:to>
+                                        <p:strVal val="visible"/>
+                                      </p:to>
+                                    </p:set>
+                                  </p:childTnLst>
+                                </p:cTn>
+                              </p:par>
+                            </p:childTnLst>
+                          </p:cTn>
+                        </p:par>
+                        <p:par>
+                          <p:cTn id="7" fill="hold">
+                            <p:stCondLst>
+                              <p:cond delay="0"/>
+                            </p:stCondLst>
+                            <p:childTnLst>
+                              <p:par>
+                                <p:cTn id="8" presetID="1" presetClass="entr" presetSubtype="0" fill="hold" nodeType="afterEffect">
+                                  <p:stCondLst>
+                                    <p:cond delay="0"/>
+                                  </p:stCondLst>
+                                  <p:childTnLst>
+                                    <p:set>
+                                      <p:cBhvr>
+                                        <p:cTn id="9" dur="1" fill="hold">
+                                          <p:stCondLst>
+                                            <p:cond delay="0"/>
+                                          </p:stCondLst>
+                                        </p:cTn>
+                                        <p:tgtEl>
+                                          <p:spTgt spid="6"/>
+                                        </p:tgtEl>
+                                        <p:attrNameLst>
+                                          <p:attrName>style.visibility</p:attrName>
+                                        </p:attrNameLst>
+                                      </p:cBhvr>
+                                      <p:to>
+                                        <p:strVal val="visible"/>
+                                      </p:to>
+                                    </p:set>
+                                  </p:childTnLst>
+                                </p:cTn>
+                              </p:par>
+                            </p:childTnLst>
+                          </p:cTn>
+                        </p:par>
+                        <p:par>
+                          <p:cTn id="10" fill="hold">
+                            <p:stCondLst>
+                              <p:cond delay="0"/>
+                            </p:stCondLst>
+                            <p:childTnLst>
+                              <p:par>
+                                <p:cTn id="11" presetID="1" presetClass="entr" presetSubtype="0" fill="hold" grpId="0" nodeType="afterEffect">
+                                  <p:stCondLst>
+                                    <p:cond delay="0"/>
+                                  </p:stCondLst>
+                                  <p:childTnLst>
+                                    <p:set>
+                                      <p:cBhvr>
+                                        <p:cTn id="12" dur="1" fill="hold">
+                                          <p:stCondLst>
+                                            <p:cond delay="0"/>
+                                          </p:stCondLst>
+                                        </p:cTn>
+                                        <p:tgtEl>
+                                          <p:spTgt spid="7">
+                                            <p:txEl>
+                                              <p:pRg st="0" end="0"/>
+                                            </p:txEl>
+                                          </p:spTgt>
+                                        </p:tgtEl>
+                                        <p:attrNameLst>
+                                          <p:attrName>style.visibility</p:attrName>
+                                        </p:attrNameLst>
+                                      </p:cBhvr>
+                                      <p:to>
+                                        <p:strVal val="visible"/>
+                                      </p:to>
+                                    </p:set>
+                                  </p:childTnLst>
+                                </p:cTn>
+                              </p:par>
+                            </p:childTnLst>
+                          </p:cTn>
+                        </p:par>
+                        <p:par>
+                          <p:cTn id="13" fill="hold">
+                            <p:stCondLst>
+                              <p:cond delay="0"/>
+                            </p:stCondLst>
+                            <p:childTnLst>
+                              <p:par>
+                                <p:cTn id="14" presetID="1" presetClass="entr" presetSubtype="0" fill="hold" grpId="0" nodeType="afterEffect">
+                                  <p:stCondLst>
+                                    <p:cond delay="0"/>
+                                  </p:stCondLst>
+                                  <p:childTnLst>
+                                    <p:set>
+                                      <p:cBhvr>
+                                        <p:cTn id="15" dur="1" fill="hold">
+                                          <p:stCondLst>
+                                            <p:cond delay="0"/>
+                                          </p:stCondLst>
+                                        </p:cTn>
+                                        <p:tgtEl>
+                                          <p:spTgt spid="7">
+                                            <p:txEl>
+                                              <p:pRg st="1" end="1"/>
+                                            </p:txEl>
+                                          </p:spTgt>
+                                        </p:tgtEl>
+                                        <p:attrNameLst>
+                                          <p:attrName>style.visibility</p:attrName>
+                                        </p:attrNameLst>
+                                      </p:cBhvr>
+                                      <p:to>
+                                        <p:strVal val="visible"/>
+                                      </p:to>
+                                    </p:set>
+                                  </p:childTnLst>
+                                </p:cTn>
+                              </p:par>
+                            </p:childTnLst>
+                          </p:cTn>
+                        </p:par>
+                        <p:par>
+                          <p:cTn id="16" fill="hold">
+                            <p:stCondLst>
+                              <p:cond delay="0"/>
+                            </p:stCondLst>
+                            <p:childTnLst>
+                              <p:par>
+                                <p:cTn id="17" presetID="1" presetClass="entr" presetSubtype="0" fill="hold" grpId="0" nodeType="afterEffect">
+                                  <p:stCondLst>
+                                    <p:cond delay="0"/>
+                                  </p:stCondLst>
+                                  <p:childTnLst>
+                                    <p:set>
+                                      <p:cBhvr>
+                                        <p:cTn id="18" dur="1" fill="hold">
+                                          <p:stCondLst>
+                                            <p:cond delay="0"/>
+                                          </p:stCondLst>
+                                        </p:cTn>
+                                        <p:tgtEl>
+                                          <p:spTgt spid="7">
+                                            <p:txEl>
+                                              <p:pRg st="2" end="2"/>
+                                            </p:txEl>
+                                          </p:spTgt>
+                                        </p:tgtEl>
+                                        <p:attrNameLst>
+                                          <p:attrName>style.visibility</p:attrName>
+                                        </p:attrNameLst>
+                                      </p:cBhvr>
+                                      <p:to>
+                                        <p:strVal val="visible"/>
+                                      </p:to>
+                                    </p:set>
+                                  </p:childTnLst>
+                                </p:cTn>
+                              </p:par>
+                            </p:childTnLst>
+                          </p:cTn>
+                        </p:par>
+                      </p:childTnLst>
+                    </p:cTn>
+                  </p:par>
+                </p:childTnLst>
+              </p:cTn>
+              <p:prevCondLst>
+                <p:cond evt="onPrev" delay="0">
+                  <p:tgtEl>
+                    <p:sldTgt/>
+                  </p:tgtEl>
+                </p:cond>
+              </p:prevCondLst>
+              <p:nextCondLst>
+                <p:cond evt="onNext" delay="0">
+                  <p:tgtEl>
+                    <p:sldTgt/>
+                  </p:tgtEl>
+                </p:cond>
+              </p:nextCondLst>
+            </p:seq>
+          </p:childTnLst>
+        </p:cTn>
+      </p:par>
+    </p:tnLst>
+    <p:bldLst>
+      <p:bldP spid="2" grpId="0"/>
+      <p:bldP spid="7" grpId="0" uiExpand="1" build="p"/>
+    </p:bldLst>
+  </p:timing>
 </p:sld>
 </file>
 
@@ -2222,6 +2665,401 @@
   <p:clrMapOvr>
     <a:masterClrMapping/>
   </p:clrMapOvr>
+  <p:timing>
+    <p:tnLst>
+      <p:par>
+        <p:cTn id="1" dur="indefinite" restart="never" nodeType="tmRoot">
+          <p:childTnLst>
+            <p:seq concurrent="1" nextAc="seek">
+              <p:cTn id="2" dur="indefinite" nodeType="mainSeq">
+                <p:childTnLst>
+                  <p:par>
+                    <p:cTn id="3" fill="hold">
+                      <p:stCondLst>
+                        <p:cond delay="indefinite"/>
+                      </p:stCondLst>
+                      <p:childTnLst>
+                        <p:par>
+                          <p:cTn id="4" fill="hold">
+                            <p:stCondLst>
+                              <p:cond delay="0"/>
+                            </p:stCondLst>
+                            <p:childTnLst>
+                              <p:par>
+                                <p:cTn id="5" presetID="1" presetClass="entr" presetSubtype="0" fill="hold" grpId="0" nodeType="clickEffect">
+                                  <p:stCondLst>
+                                    <p:cond delay="0"/>
+                                  </p:stCondLst>
+                                  <p:childTnLst>
+                                    <p:set>
+                                      <p:cBhvr>
+                                        <p:cTn id="6" dur="1" fill="hold">
+                                          <p:stCondLst>
+                                            <p:cond delay="0"/>
+                                          </p:stCondLst>
+                                        </p:cTn>
+                                        <p:tgtEl>
+                                          <p:spTgt spid="2"/>
+                                        </p:tgtEl>
+                                        <p:attrNameLst>
+                                          <p:attrName>style.visibility</p:attrName>
+                                        </p:attrNameLst>
+                                      </p:cBhvr>
+                                      <p:to>
+                                        <p:strVal val="visible"/>
+                                      </p:to>
+                                    </p:set>
+                                  </p:childTnLst>
+                                </p:cTn>
+                              </p:par>
+                            </p:childTnLst>
+                          </p:cTn>
+                        </p:par>
+                        <p:par>
+                          <p:cTn id="7" fill="hold">
+                            <p:stCondLst>
+                              <p:cond delay="0"/>
+                            </p:stCondLst>
+                            <p:childTnLst>
+                              <p:par>
+                                <p:cTn id="8" presetID="1" presetClass="entr" presetSubtype="0" fill="hold" nodeType="afterEffect">
+                                  <p:stCondLst>
+                                    <p:cond delay="0"/>
+                                  </p:stCondLst>
+                                  <p:childTnLst>
+                                    <p:set>
+                                      <p:cBhvr>
+                                        <p:cTn id="9" dur="1" fill="hold">
+                                          <p:stCondLst>
+                                            <p:cond delay="0"/>
+                                          </p:stCondLst>
+                                        </p:cTn>
+                                        <p:tgtEl>
+                                          <p:spTgt spid="6"/>
+                                        </p:tgtEl>
+                                        <p:attrNameLst>
+                                          <p:attrName>style.visibility</p:attrName>
+                                        </p:attrNameLst>
+                                      </p:cBhvr>
+                                      <p:to>
+                                        <p:strVal val="visible"/>
+                                      </p:to>
+                                    </p:set>
+                                  </p:childTnLst>
+                                </p:cTn>
+                              </p:par>
+                            </p:childTnLst>
+                          </p:cTn>
+                        </p:par>
+                        <p:par>
+                          <p:cTn id="10" fill="hold">
+                            <p:stCondLst>
+                              <p:cond delay="0"/>
+                            </p:stCondLst>
+                            <p:childTnLst>
+                              <p:par>
+                                <p:cTn id="11" presetID="1" presetClass="entr" presetSubtype="0" fill="hold" grpId="0" nodeType="afterEffect">
+                                  <p:stCondLst>
+                                    <p:cond delay="0"/>
+                                  </p:stCondLst>
+                                  <p:childTnLst>
+                                    <p:set>
+                                      <p:cBhvr>
+                                        <p:cTn id="12" dur="1" fill="hold">
+                                          <p:stCondLst>
+                                            <p:cond delay="0"/>
+                                          </p:stCondLst>
+                                        </p:cTn>
+                                        <p:tgtEl>
+                                          <p:spTgt spid="3">
+                                            <p:txEl>
+                                              <p:pRg st="0" end="0"/>
+                                            </p:txEl>
+                                          </p:spTgt>
+                                        </p:tgtEl>
+                                        <p:attrNameLst>
+                                          <p:attrName>style.visibility</p:attrName>
+                                        </p:attrNameLst>
+                                      </p:cBhvr>
+                                      <p:to>
+                                        <p:strVal val="visible"/>
+                                      </p:to>
+                                    </p:set>
+                                  </p:childTnLst>
+                                </p:cTn>
+                              </p:par>
+                            </p:childTnLst>
+                          </p:cTn>
+                        </p:par>
+                        <p:par>
+                          <p:cTn id="13" fill="hold">
+                            <p:stCondLst>
+                              <p:cond delay="0"/>
+                            </p:stCondLst>
+                            <p:childTnLst>
+                              <p:par>
+                                <p:cTn id="14" presetID="1" presetClass="entr" presetSubtype="0" fill="hold" grpId="0" nodeType="afterEffect">
+                                  <p:stCondLst>
+                                    <p:cond delay="0"/>
+                                  </p:stCondLst>
+                                  <p:childTnLst>
+                                    <p:set>
+                                      <p:cBhvr>
+                                        <p:cTn id="15" dur="1" fill="hold">
+                                          <p:stCondLst>
+                                            <p:cond delay="0"/>
+                                          </p:stCondLst>
+                                        </p:cTn>
+                                        <p:tgtEl>
+                                          <p:spTgt spid="3">
+                                            <p:txEl>
+                                              <p:pRg st="1" end="1"/>
+                                            </p:txEl>
+                                          </p:spTgt>
+                                        </p:tgtEl>
+                                        <p:attrNameLst>
+                                          <p:attrName>style.visibility</p:attrName>
+                                        </p:attrNameLst>
+                                      </p:cBhvr>
+                                      <p:to>
+                                        <p:strVal val="visible"/>
+                                      </p:to>
+                                    </p:set>
+                                  </p:childTnLst>
+                                </p:cTn>
+                              </p:par>
+                            </p:childTnLst>
+                          </p:cTn>
+                        </p:par>
+                        <p:par>
+                          <p:cTn id="16" fill="hold">
+                            <p:stCondLst>
+                              <p:cond delay="0"/>
+                            </p:stCondLst>
+                            <p:childTnLst>
+                              <p:par>
+                                <p:cTn id="17" presetID="1" presetClass="entr" presetSubtype="0" fill="hold" grpId="0" nodeType="afterEffect">
+                                  <p:stCondLst>
+                                    <p:cond delay="0"/>
+                                  </p:stCondLst>
+                                  <p:childTnLst>
+                                    <p:set>
+                                      <p:cBhvr>
+                                        <p:cTn id="18" dur="1" fill="hold">
+                                          <p:stCondLst>
+                                            <p:cond delay="0"/>
+                                          </p:stCondLst>
+                                        </p:cTn>
+                                        <p:tgtEl>
+                                          <p:spTgt spid="3">
+                                            <p:txEl>
+                                              <p:pRg st="2" end="2"/>
+                                            </p:txEl>
+                                          </p:spTgt>
+                                        </p:tgtEl>
+                                        <p:attrNameLst>
+                                          <p:attrName>style.visibility</p:attrName>
+                                        </p:attrNameLst>
+                                      </p:cBhvr>
+                                      <p:to>
+                                        <p:strVal val="visible"/>
+                                      </p:to>
+                                    </p:set>
+                                  </p:childTnLst>
+                                </p:cTn>
+                              </p:par>
+                            </p:childTnLst>
+                          </p:cTn>
+                        </p:par>
+                        <p:par>
+                          <p:cTn id="19" fill="hold">
+                            <p:stCondLst>
+                              <p:cond delay="0"/>
+                            </p:stCondLst>
+                            <p:childTnLst>
+                              <p:par>
+                                <p:cTn id="20" presetID="1" presetClass="entr" presetSubtype="0" fill="hold" grpId="0" nodeType="afterEffect">
+                                  <p:stCondLst>
+                                    <p:cond delay="0"/>
+                                  </p:stCondLst>
+                                  <p:childTnLst>
+                                    <p:set>
+                                      <p:cBhvr>
+                                        <p:cTn id="21" dur="1" fill="hold">
+                                          <p:stCondLst>
+                                            <p:cond delay="0"/>
+                                          </p:stCondLst>
+                                        </p:cTn>
+                                        <p:tgtEl>
+                                          <p:spTgt spid="3">
+                                            <p:txEl>
+                                              <p:pRg st="3" end="3"/>
+                                            </p:txEl>
+                                          </p:spTgt>
+                                        </p:tgtEl>
+                                        <p:attrNameLst>
+                                          <p:attrName>style.visibility</p:attrName>
+                                        </p:attrNameLst>
+                                      </p:cBhvr>
+                                      <p:to>
+                                        <p:strVal val="visible"/>
+                                      </p:to>
+                                    </p:set>
+                                  </p:childTnLst>
+                                </p:cTn>
+                              </p:par>
+                            </p:childTnLst>
+                          </p:cTn>
+                        </p:par>
+                        <p:par>
+                          <p:cTn id="22" fill="hold">
+                            <p:stCondLst>
+                              <p:cond delay="0"/>
+                            </p:stCondLst>
+                            <p:childTnLst>
+                              <p:par>
+                                <p:cTn id="23" presetID="1" presetClass="entr" presetSubtype="0" fill="hold" grpId="0" nodeType="afterEffect">
+                                  <p:stCondLst>
+                                    <p:cond delay="0"/>
+                                  </p:stCondLst>
+                                  <p:childTnLst>
+                                    <p:set>
+                                      <p:cBhvr>
+                                        <p:cTn id="24" dur="1" fill="hold">
+                                          <p:stCondLst>
+                                            <p:cond delay="0"/>
+                                          </p:stCondLst>
+                                        </p:cTn>
+                                        <p:tgtEl>
+                                          <p:spTgt spid="3">
+                                            <p:txEl>
+                                              <p:pRg st="4" end="4"/>
+                                            </p:txEl>
+                                          </p:spTgt>
+                                        </p:tgtEl>
+                                        <p:attrNameLst>
+                                          <p:attrName>style.visibility</p:attrName>
+                                        </p:attrNameLst>
+                                      </p:cBhvr>
+                                      <p:to>
+                                        <p:strVal val="visible"/>
+                                      </p:to>
+                                    </p:set>
+                                  </p:childTnLst>
+                                </p:cTn>
+                              </p:par>
+                            </p:childTnLst>
+                          </p:cTn>
+                        </p:par>
+                        <p:par>
+                          <p:cTn id="25" fill="hold">
+                            <p:stCondLst>
+                              <p:cond delay="0"/>
+                            </p:stCondLst>
+                            <p:childTnLst>
+                              <p:par>
+                                <p:cTn id="26" presetID="1" presetClass="entr" presetSubtype="0" fill="hold" grpId="0" nodeType="afterEffect">
+                                  <p:stCondLst>
+                                    <p:cond delay="0"/>
+                                  </p:stCondLst>
+                                  <p:childTnLst>
+                                    <p:set>
+                                      <p:cBhvr>
+                                        <p:cTn id="27" dur="1" fill="hold">
+                                          <p:stCondLst>
+                                            <p:cond delay="0"/>
+                                          </p:stCondLst>
+                                        </p:cTn>
+                                        <p:tgtEl>
+                                          <p:spTgt spid="3">
+                                            <p:txEl>
+                                              <p:pRg st="5" end="5"/>
+                                            </p:txEl>
+                                          </p:spTgt>
+                                        </p:tgtEl>
+                                        <p:attrNameLst>
+                                          <p:attrName>style.visibility</p:attrName>
+                                        </p:attrNameLst>
+                                      </p:cBhvr>
+                                      <p:to>
+                                        <p:strVal val="visible"/>
+                                      </p:to>
+                                    </p:set>
+                                  </p:childTnLst>
+                                </p:cTn>
+                              </p:par>
+                            </p:childTnLst>
+                          </p:cTn>
+                        </p:par>
+                        <p:par>
+                          <p:cTn id="28" fill="hold">
+                            <p:stCondLst>
+                              <p:cond delay="0"/>
+                            </p:stCondLst>
+                            <p:childTnLst>
+                              <p:par>
+                                <p:cTn id="29" presetID="1" presetClass="entr" presetSubtype="0" fill="hold" grpId="0" nodeType="afterEffect">
+                                  <p:stCondLst>
+                                    <p:cond delay="0"/>
+                                  </p:stCondLst>
+                                  <p:childTnLst>
+                                    <p:set>
+                                      <p:cBhvr>
+                                        <p:cTn id="30" dur="1" fill="hold">
+                                          <p:stCondLst>
+                                            <p:cond delay="0"/>
+                                          </p:stCondLst>
+                                        </p:cTn>
+                                        <p:tgtEl>
+                                          <p:spTgt spid="3">
+                                            <p:txEl>
+                                              <p:pRg st="6" end="6"/>
+                                            </p:txEl>
+                                          </p:spTgt>
+                                        </p:tgtEl>
+                                        <p:attrNameLst>
+                                          <p:attrName>style.visibility</p:attrName>
+                                        </p:attrNameLst>
+                                      </p:cBhvr>
+                                      <p:to>
+                                        <p:strVal val="visible"/>
+                                      </p:to>
+                                    </p:set>
+                                  </p:childTnLst>
+                                </p:cTn>
+                              </p:par>
+                            </p:childTnLst>
+                          </p:cTn>
+                        </p:par>
+                      </p:childTnLst>
+                    </p:cTn>
+                  </p:par>
+                </p:childTnLst>
+              </p:cTn>
+              <p:prevCondLst>
+                <p:cond evt="onPrev" delay="0">
+                  <p:tgtEl>
+                    <p:sldTgt/>
+                  </p:tgtEl>
+                </p:cond>
+              </p:prevCondLst>
+              <p:nextCondLst>
+                <p:cond evt="onNext" delay="0">
+                  <p:tgtEl>
+                    <p:sldTgt/>
+                  </p:tgtEl>
+                </p:cond>
+              </p:nextCondLst>
+            </p:seq>
+          </p:childTnLst>
+        </p:cTn>
+      </p:par>
+    </p:tnLst>
+    <p:bldLst>
+      <p:bldP spid="2" grpId="0"/>
+      <p:bldP spid="3" grpId="0" build="p"/>
+    </p:bldLst>
+  </p:timing>
 </p:sld>
 </file>
 
@@ -2596,6 +3434,193 @@
   <p:clrMapOvr>
     <a:masterClrMapping/>
   </p:clrMapOvr>
+  <p:timing>
+    <p:tnLst>
+      <p:par>
+        <p:cTn id="1" dur="indefinite" restart="never" nodeType="tmRoot">
+          <p:childTnLst>
+            <p:seq concurrent="1" nextAc="seek">
+              <p:cTn id="2" dur="indefinite" nodeType="mainSeq">
+                <p:childTnLst>
+                  <p:par>
+                    <p:cTn id="3" fill="hold">
+                      <p:stCondLst>
+                        <p:cond delay="indefinite"/>
+                      </p:stCondLst>
+                      <p:childTnLst>
+                        <p:par>
+                          <p:cTn id="4" fill="hold">
+                            <p:stCondLst>
+                              <p:cond delay="0"/>
+                            </p:stCondLst>
+                            <p:childTnLst>
+                              <p:par>
+                                <p:cTn id="5" presetID="1" presetClass="entr" presetSubtype="0" fill="hold" grpId="0" nodeType="clickEffect">
+                                  <p:stCondLst>
+                                    <p:cond delay="0"/>
+                                  </p:stCondLst>
+                                  <p:childTnLst>
+                                    <p:set>
+                                      <p:cBhvr>
+                                        <p:cTn id="6" dur="1" fill="hold">
+                                          <p:stCondLst>
+                                            <p:cond delay="0"/>
+                                          </p:stCondLst>
+                                        </p:cTn>
+                                        <p:tgtEl>
+                                          <p:spTgt spid="2"/>
+                                        </p:tgtEl>
+                                        <p:attrNameLst>
+                                          <p:attrName>style.visibility</p:attrName>
+                                        </p:attrNameLst>
+                                      </p:cBhvr>
+                                      <p:to>
+                                        <p:strVal val="visible"/>
+                                      </p:to>
+                                    </p:set>
+                                  </p:childTnLst>
+                                </p:cTn>
+                              </p:par>
+                            </p:childTnLst>
+                          </p:cTn>
+                        </p:par>
+                        <p:par>
+                          <p:cTn id="7" fill="hold">
+                            <p:stCondLst>
+                              <p:cond delay="0"/>
+                            </p:stCondLst>
+                            <p:childTnLst>
+                              <p:par>
+                                <p:cTn id="8" presetID="1" presetClass="entr" presetSubtype="0" fill="hold" nodeType="afterEffect">
+                                  <p:stCondLst>
+                                    <p:cond delay="0"/>
+                                  </p:stCondLst>
+                                  <p:childTnLst>
+                                    <p:set>
+                                      <p:cBhvr>
+                                        <p:cTn id="9" dur="1" fill="hold">
+                                          <p:stCondLst>
+                                            <p:cond delay="0"/>
+                                          </p:stCondLst>
+                                        </p:cTn>
+                                        <p:tgtEl>
+                                          <p:spTgt spid="6"/>
+                                        </p:tgtEl>
+                                        <p:attrNameLst>
+                                          <p:attrName>style.visibility</p:attrName>
+                                        </p:attrNameLst>
+                                      </p:cBhvr>
+                                      <p:to>
+                                        <p:strVal val="visible"/>
+                                      </p:to>
+                                    </p:set>
+                                  </p:childTnLst>
+                                </p:cTn>
+                              </p:par>
+                            </p:childTnLst>
+                          </p:cTn>
+                        </p:par>
+                        <p:par>
+                          <p:cTn id="10" fill="hold">
+                            <p:stCondLst>
+                              <p:cond delay="0"/>
+                            </p:stCondLst>
+                            <p:childTnLst>
+                              <p:par>
+                                <p:cTn id="11" presetID="1" presetClass="entr" presetSubtype="0" fill="hold" nodeType="afterEffect">
+                                  <p:stCondLst>
+                                    <p:cond delay="0"/>
+                                  </p:stCondLst>
+                                  <p:childTnLst>
+                                    <p:set>
+                                      <p:cBhvr>
+                                        <p:cTn id="12" dur="1" fill="hold">
+                                          <p:stCondLst>
+                                            <p:cond delay="0"/>
+                                          </p:stCondLst>
+                                        </p:cTn>
+                                        <p:tgtEl>
+                                          <p:spTgt spid="8"/>
+                                        </p:tgtEl>
+                                        <p:attrNameLst>
+                                          <p:attrName>style.visibility</p:attrName>
+                                        </p:attrNameLst>
+                                      </p:cBhvr>
+                                      <p:to>
+                                        <p:strVal val="visible"/>
+                                      </p:to>
+                                    </p:set>
+                                  </p:childTnLst>
+                                </p:cTn>
+                              </p:par>
+                            </p:childTnLst>
+                          </p:cTn>
+                        </p:par>
+                        <p:par>
+                          <p:cTn id="13" fill="hold">
+                            <p:stCondLst>
+                              <p:cond delay="0"/>
+                            </p:stCondLst>
+                            <p:childTnLst>
+                              <p:par>
+                                <p:cTn id="14" presetID="1" presetClass="entr" presetSubtype="0" fill="hold" grpId="0" nodeType="afterEffect">
+                                  <p:stCondLst>
+                                    <p:cond delay="0"/>
+                                  </p:stCondLst>
+                                  <p:childTnLst>
+                                    <p:set>
+                                      <p:cBhvr>
+                                        <p:cTn id="15" dur="1" fill="hold">
+                                          <p:stCondLst>
+                                            <p:cond delay="0"/>
+                                          </p:stCondLst>
+                                        </p:cTn>
+                                        <p:tgtEl>
+                                          <p:spTgt spid="9"/>
+                                        </p:tgtEl>
+                                        <p:attrNameLst>
+                                          <p:attrName>style.visibility</p:attrName>
+                                        </p:attrNameLst>
+                                      </p:cBhvr>
+                                      <p:to>
+                                        <p:strVal val="visible"/>
+                                      </p:to>
+                                    </p:set>
+                                  </p:childTnLst>
+                                </p:cTn>
+                              </p:par>
+                            </p:childTnLst>
+                          </p:cTn>
+                        </p:par>
+                      </p:childTnLst>
+                    </p:cTn>
+                  </p:par>
+                </p:childTnLst>
+              </p:cTn>
+              <p:prevCondLst>
+                <p:cond evt="onPrev" delay="0">
+                  <p:tgtEl>
+                    <p:sldTgt/>
+                  </p:tgtEl>
+                </p:cond>
+              </p:prevCondLst>
+              <p:nextCondLst>
+                <p:cond evt="onNext" delay="0">
+                  <p:tgtEl>
+                    <p:sldTgt/>
+                  </p:tgtEl>
+                </p:cond>
+              </p:nextCondLst>
+            </p:seq>
+          </p:childTnLst>
+        </p:cTn>
+      </p:par>
+    </p:tnLst>
+    <p:bldLst>
+      <p:bldP spid="2" grpId="0"/>
+      <p:bldP spid="9" grpId="0"/>
+    </p:bldLst>
+  </p:timing>
 </p:sld>
 </file>
 
@@ -2931,6 +3956,157 @@
   <p:clrMapOvr>
     <a:masterClrMapping/>
   </p:clrMapOvr>
+  <p:timing>
+    <p:tnLst>
+      <p:par>
+        <p:cTn id="1" dur="indefinite" restart="never" nodeType="tmRoot">
+          <p:childTnLst>
+            <p:seq concurrent="1" nextAc="seek">
+              <p:cTn id="2" dur="indefinite" nodeType="mainSeq">
+                <p:childTnLst>
+                  <p:par>
+                    <p:cTn id="3" fill="hold">
+                      <p:stCondLst>
+                        <p:cond delay="indefinite"/>
+                      </p:stCondLst>
+                      <p:childTnLst>
+                        <p:par>
+                          <p:cTn id="4" fill="hold">
+                            <p:stCondLst>
+                              <p:cond delay="0"/>
+                            </p:stCondLst>
+                            <p:childTnLst>
+                              <p:par>
+                                <p:cTn id="5" presetID="1" presetClass="entr" presetSubtype="0" fill="hold" grpId="0" nodeType="clickEffect">
+                                  <p:stCondLst>
+                                    <p:cond delay="0"/>
+                                  </p:stCondLst>
+                                  <p:childTnLst>
+                                    <p:set>
+                                      <p:cBhvr>
+                                        <p:cTn id="6" dur="1" fill="hold">
+                                          <p:stCondLst>
+                                            <p:cond delay="0"/>
+                                          </p:stCondLst>
+                                        </p:cTn>
+                                        <p:tgtEl>
+                                          <p:spTgt spid="2"/>
+                                        </p:tgtEl>
+                                        <p:attrNameLst>
+                                          <p:attrName>style.visibility</p:attrName>
+                                        </p:attrNameLst>
+                                      </p:cBhvr>
+                                      <p:to>
+                                        <p:strVal val="visible"/>
+                                      </p:to>
+                                    </p:set>
+                                  </p:childTnLst>
+                                </p:cTn>
+                              </p:par>
+                            </p:childTnLst>
+                          </p:cTn>
+                        </p:par>
+                        <p:par>
+                          <p:cTn id="7" fill="hold">
+                            <p:stCondLst>
+                              <p:cond delay="0"/>
+                            </p:stCondLst>
+                            <p:childTnLst>
+                              <p:par>
+                                <p:cTn id="8" presetID="1" presetClass="entr" presetSubtype="0" fill="hold" nodeType="afterEffect">
+                                  <p:stCondLst>
+                                    <p:cond delay="0"/>
+                                  </p:stCondLst>
+                                  <p:childTnLst>
+                                    <p:set>
+                                      <p:cBhvr>
+                                        <p:cTn id="9" dur="1" fill="hold">
+                                          <p:stCondLst>
+                                            <p:cond delay="0"/>
+                                          </p:stCondLst>
+                                        </p:cTn>
+                                        <p:tgtEl>
+                                          <p:spTgt spid="6"/>
+                                        </p:tgtEl>
+                                        <p:attrNameLst>
+                                          <p:attrName>style.visibility</p:attrName>
+                                        </p:attrNameLst>
+                                      </p:cBhvr>
+                                      <p:to>
+                                        <p:strVal val="visible"/>
+                                      </p:to>
+                                    </p:set>
+                                  </p:childTnLst>
+                                </p:cTn>
+                              </p:par>
+                            </p:childTnLst>
+                          </p:cTn>
+                        </p:par>
+                        <p:par>
+                          <p:cTn id="10" fill="hold">
+                            <p:stCondLst>
+                              <p:cond delay="0"/>
+                            </p:stCondLst>
+                            <p:childTnLst>
+                              <p:par>
+                                <p:cTn id="11" presetID="1" presetClass="entr" presetSubtype="0" fill="hold" grpId="0" nodeType="afterEffect">
+                                  <p:stCondLst>
+                                    <p:cond delay="0"/>
+                                  </p:stCondLst>
+                                  <p:childTnLst>
+                                    <p:set>
+                                      <p:cBhvr>
+                                        <p:cTn id="12" dur="1" fill="hold">
+                                          <p:stCondLst>
+                                            <p:cond delay="0"/>
+                                          </p:stCondLst>
+                                        </p:cTn>
+                                        <p:tgtEl>
+                                          <p:spTgt spid="7"/>
+                                        </p:tgtEl>
+                                        <p:attrNameLst>
+                                          <p:attrName>style.visibility</p:attrName>
+                                        </p:attrNameLst>
+                                      </p:cBhvr>
+                                      <p:to>
+                                        <p:strVal val="visible"/>
+                                      </p:to>
+                                    </p:set>
+                                  </p:childTnLst>
+                                </p:cTn>
+                              </p:par>
+                            </p:childTnLst>
+                          </p:cTn>
+                        </p:par>
+                      </p:childTnLst>
+                    </p:cTn>
+                  </p:par>
+                </p:childTnLst>
+              </p:cTn>
+              <p:prevCondLst>
+                <p:cond evt="onPrev" delay="0">
+                  <p:tgtEl>
+                    <p:sldTgt/>
+                  </p:tgtEl>
+                </p:cond>
+              </p:prevCondLst>
+              <p:nextCondLst>
+                <p:cond evt="onNext" delay="0">
+                  <p:tgtEl>
+                    <p:sldTgt/>
+                  </p:tgtEl>
+                </p:cond>
+              </p:nextCondLst>
+            </p:seq>
+          </p:childTnLst>
+        </p:cTn>
+      </p:par>
+    </p:tnLst>
+    <p:bldLst>
+      <p:bldP spid="2" grpId="0"/>
+      <p:bldP spid="7" grpId="0"/>
+    </p:bldLst>
+  </p:timing>
 </p:sld>
 </file>
 
@@ -3105,6 +4281,281 @@
   <p:clrMapOvr>
     <a:masterClrMapping/>
   </p:clrMapOvr>
+  <p:timing>
+    <p:tnLst>
+      <p:par>
+        <p:cTn id="1" dur="indefinite" restart="never" nodeType="tmRoot">
+          <p:childTnLst>
+            <p:seq concurrent="1" nextAc="seek">
+              <p:cTn id="2" dur="indefinite" nodeType="mainSeq">
+                <p:childTnLst>
+                  <p:par>
+                    <p:cTn id="3" fill="hold">
+                      <p:stCondLst>
+                        <p:cond delay="indefinite"/>
+                      </p:stCondLst>
+                      <p:childTnLst>
+                        <p:par>
+                          <p:cTn id="4" fill="hold">
+                            <p:stCondLst>
+                              <p:cond delay="0"/>
+                            </p:stCondLst>
+                            <p:childTnLst>
+                              <p:par>
+                                <p:cTn id="5" presetID="1" presetClass="entr" presetSubtype="0" fill="hold" grpId="0" nodeType="clickEffect">
+                                  <p:stCondLst>
+                                    <p:cond delay="0"/>
+                                  </p:stCondLst>
+                                  <p:childTnLst>
+                                    <p:set>
+                                      <p:cBhvr>
+                                        <p:cTn id="6" dur="1" fill="hold">
+                                          <p:stCondLst>
+                                            <p:cond delay="0"/>
+                                          </p:stCondLst>
+                                        </p:cTn>
+                                        <p:tgtEl>
+                                          <p:spTgt spid="2"/>
+                                        </p:tgtEl>
+                                        <p:attrNameLst>
+                                          <p:attrName>style.visibility</p:attrName>
+                                        </p:attrNameLst>
+                                      </p:cBhvr>
+                                      <p:to>
+                                        <p:strVal val="visible"/>
+                                      </p:to>
+                                    </p:set>
+                                  </p:childTnLst>
+                                </p:cTn>
+                              </p:par>
+                            </p:childTnLst>
+                          </p:cTn>
+                        </p:par>
+                        <p:par>
+                          <p:cTn id="7" fill="hold">
+                            <p:stCondLst>
+                              <p:cond delay="0"/>
+                            </p:stCondLst>
+                            <p:childTnLst>
+                              <p:par>
+                                <p:cTn id="8" presetID="1" presetClass="entr" presetSubtype="0" fill="hold" nodeType="afterEffect">
+                                  <p:stCondLst>
+                                    <p:cond delay="0"/>
+                                  </p:stCondLst>
+                                  <p:childTnLst>
+                                    <p:set>
+                                      <p:cBhvr>
+                                        <p:cTn id="9" dur="1" fill="hold">
+                                          <p:stCondLst>
+                                            <p:cond delay="0"/>
+                                          </p:stCondLst>
+                                        </p:cTn>
+                                        <p:tgtEl>
+                                          <p:spTgt spid="6"/>
+                                        </p:tgtEl>
+                                        <p:attrNameLst>
+                                          <p:attrName>style.visibility</p:attrName>
+                                        </p:attrNameLst>
+                                      </p:cBhvr>
+                                      <p:to>
+                                        <p:strVal val="visible"/>
+                                      </p:to>
+                                    </p:set>
+                                  </p:childTnLst>
+                                </p:cTn>
+                              </p:par>
+                            </p:childTnLst>
+                          </p:cTn>
+                        </p:par>
+                        <p:par>
+                          <p:cTn id="10" fill="hold">
+                            <p:stCondLst>
+                              <p:cond delay="0"/>
+                            </p:stCondLst>
+                            <p:childTnLst>
+                              <p:par>
+                                <p:cTn id="11" presetID="1" presetClass="entr" presetSubtype="0" fill="hold" grpId="0" nodeType="afterEffect">
+                                  <p:stCondLst>
+                                    <p:cond delay="0"/>
+                                  </p:stCondLst>
+                                  <p:childTnLst>
+                                    <p:set>
+                                      <p:cBhvr>
+                                        <p:cTn id="12" dur="1" fill="hold">
+                                          <p:stCondLst>
+                                            <p:cond delay="0"/>
+                                          </p:stCondLst>
+                                        </p:cTn>
+                                        <p:tgtEl>
+                                          <p:spTgt spid="3">
+                                            <p:txEl>
+                                              <p:pRg st="0" end="0"/>
+                                            </p:txEl>
+                                          </p:spTgt>
+                                        </p:tgtEl>
+                                        <p:attrNameLst>
+                                          <p:attrName>style.visibility</p:attrName>
+                                        </p:attrNameLst>
+                                      </p:cBhvr>
+                                      <p:to>
+                                        <p:strVal val="visible"/>
+                                      </p:to>
+                                    </p:set>
+                                  </p:childTnLst>
+                                </p:cTn>
+                              </p:par>
+                            </p:childTnLst>
+                          </p:cTn>
+                        </p:par>
+                        <p:par>
+                          <p:cTn id="13" fill="hold">
+                            <p:stCondLst>
+                              <p:cond delay="0"/>
+                            </p:stCondLst>
+                            <p:childTnLst>
+                              <p:par>
+                                <p:cTn id="14" presetID="1" presetClass="entr" presetSubtype="0" fill="hold" grpId="0" nodeType="afterEffect">
+                                  <p:stCondLst>
+                                    <p:cond delay="0"/>
+                                  </p:stCondLst>
+                                  <p:childTnLst>
+                                    <p:set>
+                                      <p:cBhvr>
+                                        <p:cTn id="15" dur="1" fill="hold">
+                                          <p:stCondLst>
+                                            <p:cond delay="0"/>
+                                          </p:stCondLst>
+                                        </p:cTn>
+                                        <p:tgtEl>
+                                          <p:spTgt spid="3">
+                                            <p:txEl>
+                                              <p:pRg st="1" end="1"/>
+                                            </p:txEl>
+                                          </p:spTgt>
+                                        </p:tgtEl>
+                                        <p:attrNameLst>
+                                          <p:attrName>style.visibility</p:attrName>
+                                        </p:attrNameLst>
+                                      </p:cBhvr>
+                                      <p:to>
+                                        <p:strVal val="visible"/>
+                                      </p:to>
+                                    </p:set>
+                                  </p:childTnLst>
+                                </p:cTn>
+                              </p:par>
+                            </p:childTnLst>
+                          </p:cTn>
+                        </p:par>
+                        <p:par>
+                          <p:cTn id="16" fill="hold">
+                            <p:stCondLst>
+                              <p:cond delay="0"/>
+                            </p:stCondLst>
+                            <p:childTnLst>
+                              <p:par>
+                                <p:cTn id="17" presetID="1" presetClass="entr" presetSubtype="0" fill="hold" grpId="0" nodeType="afterEffect">
+                                  <p:stCondLst>
+                                    <p:cond delay="0"/>
+                                  </p:stCondLst>
+                                  <p:childTnLst>
+                                    <p:set>
+                                      <p:cBhvr>
+                                        <p:cTn id="18" dur="1" fill="hold">
+                                          <p:stCondLst>
+                                            <p:cond delay="0"/>
+                                          </p:stCondLst>
+                                        </p:cTn>
+                                        <p:tgtEl>
+                                          <p:spTgt spid="3">
+                                            <p:txEl>
+                                              <p:pRg st="2" end="2"/>
+                                            </p:txEl>
+                                          </p:spTgt>
+                                        </p:tgtEl>
+                                        <p:attrNameLst>
+                                          <p:attrName>style.visibility</p:attrName>
+                                        </p:attrNameLst>
+                                      </p:cBhvr>
+                                      <p:to>
+                                        <p:strVal val="visible"/>
+                                      </p:to>
+                                    </p:set>
+                                  </p:childTnLst>
+                                </p:cTn>
+                              </p:par>
+                            </p:childTnLst>
+                          </p:cTn>
+                        </p:par>
+                        <p:par>
+                          <p:cTn id="19" fill="hold">
+                            <p:stCondLst>
+                              <p:cond delay="0"/>
+                            </p:stCondLst>
+                            <p:childTnLst>
+                              <p:par>
+                                <p:cTn id="20" presetID="1" presetClass="entr" presetSubtype="0" fill="hold" grpId="0" nodeType="afterEffect">
+                                  <p:stCondLst>
+                                    <p:cond delay="0"/>
+                                  </p:stCondLst>
+                                  <p:childTnLst>
+                                    <p:set>
+                                      <p:cBhvr>
+                                        <p:cTn id="21" dur="1" fill="hold">
+                                          <p:stCondLst>
+                                            <p:cond delay="0"/>
+                                          </p:stCondLst>
+                                        </p:cTn>
+                                        <p:tgtEl>
+                                          <p:spTgt spid="3">
+                                            <p:txEl>
+                                              <p:pRg st="3" end="3"/>
+                                            </p:txEl>
+                                          </p:spTgt>
+                                        </p:tgtEl>
+                                        <p:attrNameLst>
+                                          <p:attrName>style.visibility</p:attrName>
+                                        </p:attrNameLst>
+                                      </p:cBhvr>
+                                      <p:to>
+                                        <p:strVal val="visible"/>
+                                      </p:to>
+                                    </p:set>
+                                  </p:childTnLst>
+                                </p:cTn>
+                              </p:par>
+                            </p:childTnLst>
+                          </p:cTn>
+                        </p:par>
+                      </p:childTnLst>
+                    </p:cTn>
+                  </p:par>
+                </p:childTnLst>
+              </p:cTn>
+              <p:prevCondLst>
+                <p:cond evt="onPrev" delay="0">
+                  <p:tgtEl>
+                    <p:sldTgt/>
+                  </p:tgtEl>
+                </p:cond>
+              </p:prevCondLst>
+              <p:nextCondLst>
+                <p:cond evt="onNext" delay="0">
+                  <p:tgtEl>
+                    <p:sldTgt/>
+                  </p:tgtEl>
+                </p:cond>
+              </p:nextCondLst>
+            </p:seq>
+          </p:childTnLst>
+        </p:cTn>
+      </p:par>
+    </p:tnLst>
+    <p:bldLst>
+      <p:bldP spid="2" grpId="0"/>
+      <p:bldP spid="3" grpId="0" build="p"/>
+    </p:bldLst>
+  </p:timing>
 </p:sld>
 </file>
 
@@ -3335,6 +4786,481 @@
   <p:clrMapOvr>
     <a:masterClrMapping/>
   </p:clrMapOvr>
+  <p:timing>
+    <p:tnLst>
+      <p:par>
+        <p:cTn id="1" dur="indefinite" restart="never" nodeType="tmRoot">
+          <p:childTnLst>
+            <p:seq concurrent="1" nextAc="seek">
+              <p:cTn id="2" dur="indefinite" nodeType="mainSeq">
+                <p:childTnLst>
+                  <p:par>
+                    <p:cTn id="3" fill="hold">
+                      <p:stCondLst>
+                        <p:cond delay="indefinite"/>
+                      </p:stCondLst>
+                      <p:childTnLst>
+                        <p:par>
+                          <p:cTn id="4" fill="hold">
+                            <p:stCondLst>
+                              <p:cond delay="0"/>
+                            </p:stCondLst>
+                            <p:childTnLst>
+                              <p:par>
+                                <p:cTn id="5" presetID="1" presetClass="entr" presetSubtype="0" fill="hold" grpId="0" nodeType="clickEffect">
+                                  <p:stCondLst>
+                                    <p:cond delay="0"/>
+                                  </p:stCondLst>
+                                  <p:childTnLst>
+                                    <p:set>
+                                      <p:cBhvr>
+                                        <p:cTn id="6" dur="1" fill="hold">
+                                          <p:stCondLst>
+                                            <p:cond delay="0"/>
+                                          </p:stCondLst>
+                                        </p:cTn>
+                                        <p:tgtEl>
+                                          <p:spTgt spid="2"/>
+                                        </p:tgtEl>
+                                        <p:attrNameLst>
+                                          <p:attrName>style.visibility</p:attrName>
+                                        </p:attrNameLst>
+                                      </p:cBhvr>
+                                      <p:to>
+                                        <p:strVal val="visible"/>
+                                      </p:to>
+                                    </p:set>
+                                  </p:childTnLst>
+                                </p:cTn>
+                              </p:par>
+                            </p:childTnLst>
+                          </p:cTn>
+                        </p:par>
+                        <p:par>
+                          <p:cTn id="7" fill="hold">
+                            <p:stCondLst>
+                              <p:cond delay="0"/>
+                            </p:stCondLst>
+                            <p:childTnLst>
+                              <p:par>
+                                <p:cTn id="8" presetID="1" presetClass="entr" presetSubtype="0" fill="hold" nodeType="afterEffect">
+                                  <p:stCondLst>
+                                    <p:cond delay="0"/>
+                                  </p:stCondLst>
+                                  <p:childTnLst>
+                                    <p:set>
+                                      <p:cBhvr>
+                                        <p:cTn id="9" dur="1" fill="hold">
+                                          <p:stCondLst>
+                                            <p:cond delay="0"/>
+                                          </p:stCondLst>
+                                        </p:cTn>
+                                        <p:tgtEl>
+                                          <p:spTgt spid="6"/>
+                                        </p:tgtEl>
+                                        <p:attrNameLst>
+                                          <p:attrName>style.visibility</p:attrName>
+                                        </p:attrNameLst>
+                                      </p:cBhvr>
+                                      <p:to>
+                                        <p:strVal val="visible"/>
+                                      </p:to>
+                                    </p:set>
+                                  </p:childTnLst>
+                                </p:cTn>
+                              </p:par>
+                            </p:childTnLst>
+                          </p:cTn>
+                        </p:par>
+                        <p:par>
+                          <p:cTn id="10" fill="hold">
+                            <p:stCondLst>
+                              <p:cond delay="0"/>
+                            </p:stCondLst>
+                            <p:childTnLst>
+                              <p:par>
+                                <p:cTn id="11" presetID="1" presetClass="entr" presetSubtype="0" fill="hold" grpId="0" nodeType="afterEffect">
+                                  <p:stCondLst>
+                                    <p:cond delay="0"/>
+                                  </p:stCondLst>
+                                  <p:childTnLst>
+                                    <p:set>
+                                      <p:cBhvr>
+                                        <p:cTn id="12" dur="1" fill="hold">
+                                          <p:stCondLst>
+                                            <p:cond delay="0"/>
+                                          </p:stCondLst>
+                                        </p:cTn>
+                                        <p:tgtEl>
+                                          <p:spTgt spid="3">
+                                            <p:txEl>
+                                              <p:pRg st="0" end="0"/>
+                                            </p:txEl>
+                                          </p:spTgt>
+                                        </p:tgtEl>
+                                        <p:attrNameLst>
+                                          <p:attrName>style.visibility</p:attrName>
+                                        </p:attrNameLst>
+                                      </p:cBhvr>
+                                      <p:to>
+                                        <p:strVal val="visible"/>
+                                      </p:to>
+                                    </p:set>
+                                  </p:childTnLst>
+                                </p:cTn>
+                              </p:par>
+                            </p:childTnLst>
+                          </p:cTn>
+                        </p:par>
+                        <p:par>
+                          <p:cTn id="13" fill="hold">
+                            <p:stCondLst>
+                              <p:cond delay="0"/>
+                            </p:stCondLst>
+                            <p:childTnLst>
+                              <p:par>
+                                <p:cTn id="14" presetID="1" presetClass="entr" presetSubtype="0" fill="hold" grpId="0" nodeType="afterEffect">
+                                  <p:stCondLst>
+                                    <p:cond delay="0"/>
+                                  </p:stCondLst>
+                                  <p:childTnLst>
+                                    <p:set>
+                                      <p:cBhvr>
+                                        <p:cTn id="15" dur="1" fill="hold">
+                                          <p:stCondLst>
+                                            <p:cond delay="0"/>
+                                          </p:stCondLst>
+                                        </p:cTn>
+                                        <p:tgtEl>
+                                          <p:spTgt spid="3">
+                                            <p:txEl>
+                                              <p:pRg st="1" end="1"/>
+                                            </p:txEl>
+                                          </p:spTgt>
+                                        </p:tgtEl>
+                                        <p:attrNameLst>
+                                          <p:attrName>style.visibility</p:attrName>
+                                        </p:attrNameLst>
+                                      </p:cBhvr>
+                                      <p:to>
+                                        <p:strVal val="visible"/>
+                                      </p:to>
+                                    </p:set>
+                                  </p:childTnLst>
+                                </p:cTn>
+                              </p:par>
+                            </p:childTnLst>
+                          </p:cTn>
+                        </p:par>
+                        <p:par>
+                          <p:cTn id="16" fill="hold">
+                            <p:stCondLst>
+                              <p:cond delay="0"/>
+                            </p:stCondLst>
+                            <p:childTnLst>
+                              <p:par>
+                                <p:cTn id="17" presetID="1" presetClass="entr" presetSubtype="0" fill="hold" grpId="0" nodeType="afterEffect">
+                                  <p:stCondLst>
+                                    <p:cond delay="0"/>
+                                  </p:stCondLst>
+                                  <p:childTnLst>
+                                    <p:set>
+                                      <p:cBhvr>
+                                        <p:cTn id="18" dur="1" fill="hold">
+                                          <p:stCondLst>
+                                            <p:cond delay="0"/>
+                                          </p:stCondLst>
+                                        </p:cTn>
+                                        <p:tgtEl>
+                                          <p:spTgt spid="3">
+                                            <p:txEl>
+                                              <p:pRg st="2" end="2"/>
+                                            </p:txEl>
+                                          </p:spTgt>
+                                        </p:tgtEl>
+                                        <p:attrNameLst>
+                                          <p:attrName>style.visibility</p:attrName>
+                                        </p:attrNameLst>
+                                      </p:cBhvr>
+                                      <p:to>
+                                        <p:strVal val="visible"/>
+                                      </p:to>
+                                    </p:set>
+                                  </p:childTnLst>
+                                </p:cTn>
+                              </p:par>
+                            </p:childTnLst>
+                          </p:cTn>
+                        </p:par>
+                        <p:par>
+                          <p:cTn id="19" fill="hold">
+                            <p:stCondLst>
+                              <p:cond delay="0"/>
+                            </p:stCondLst>
+                            <p:childTnLst>
+                              <p:par>
+                                <p:cTn id="20" presetID="1" presetClass="entr" presetSubtype="0" fill="hold" grpId="0" nodeType="afterEffect">
+                                  <p:stCondLst>
+                                    <p:cond delay="0"/>
+                                  </p:stCondLst>
+                                  <p:childTnLst>
+                                    <p:set>
+                                      <p:cBhvr>
+                                        <p:cTn id="21" dur="1" fill="hold">
+                                          <p:stCondLst>
+                                            <p:cond delay="0"/>
+                                          </p:stCondLst>
+                                        </p:cTn>
+                                        <p:tgtEl>
+                                          <p:spTgt spid="3">
+                                            <p:txEl>
+                                              <p:pRg st="3" end="3"/>
+                                            </p:txEl>
+                                          </p:spTgt>
+                                        </p:tgtEl>
+                                        <p:attrNameLst>
+                                          <p:attrName>style.visibility</p:attrName>
+                                        </p:attrNameLst>
+                                      </p:cBhvr>
+                                      <p:to>
+                                        <p:strVal val="visible"/>
+                                      </p:to>
+                                    </p:set>
+                                  </p:childTnLst>
+                                </p:cTn>
+                              </p:par>
+                            </p:childTnLst>
+                          </p:cTn>
+                        </p:par>
+                        <p:par>
+                          <p:cTn id="22" fill="hold">
+                            <p:stCondLst>
+                              <p:cond delay="0"/>
+                            </p:stCondLst>
+                            <p:childTnLst>
+                              <p:par>
+                                <p:cTn id="23" presetID="1" presetClass="entr" presetSubtype="0" fill="hold" grpId="0" nodeType="afterEffect">
+                                  <p:stCondLst>
+                                    <p:cond delay="0"/>
+                                  </p:stCondLst>
+                                  <p:childTnLst>
+                                    <p:set>
+                                      <p:cBhvr>
+                                        <p:cTn id="24" dur="1" fill="hold">
+                                          <p:stCondLst>
+                                            <p:cond delay="0"/>
+                                          </p:stCondLst>
+                                        </p:cTn>
+                                        <p:tgtEl>
+                                          <p:spTgt spid="3">
+                                            <p:txEl>
+                                              <p:pRg st="4" end="4"/>
+                                            </p:txEl>
+                                          </p:spTgt>
+                                        </p:tgtEl>
+                                        <p:attrNameLst>
+                                          <p:attrName>style.visibility</p:attrName>
+                                        </p:attrNameLst>
+                                      </p:cBhvr>
+                                      <p:to>
+                                        <p:strVal val="visible"/>
+                                      </p:to>
+                                    </p:set>
+                                  </p:childTnLst>
+                                </p:cTn>
+                              </p:par>
+                            </p:childTnLst>
+                          </p:cTn>
+                        </p:par>
+                        <p:par>
+                          <p:cTn id="25" fill="hold">
+                            <p:stCondLst>
+                              <p:cond delay="0"/>
+                            </p:stCondLst>
+                            <p:childTnLst>
+                              <p:par>
+                                <p:cTn id="26" presetID="1" presetClass="entr" presetSubtype="0" fill="hold" grpId="0" nodeType="afterEffect">
+                                  <p:stCondLst>
+                                    <p:cond delay="0"/>
+                                  </p:stCondLst>
+                                  <p:childTnLst>
+                                    <p:set>
+                                      <p:cBhvr>
+                                        <p:cTn id="27" dur="1" fill="hold">
+                                          <p:stCondLst>
+                                            <p:cond delay="0"/>
+                                          </p:stCondLst>
+                                        </p:cTn>
+                                        <p:tgtEl>
+                                          <p:spTgt spid="3">
+                                            <p:txEl>
+                                              <p:pRg st="5" end="5"/>
+                                            </p:txEl>
+                                          </p:spTgt>
+                                        </p:tgtEl>
+                                        <p:attrNameLst>
+                                          <p:attrName>style.visibility</p:attrName>
+                                        </p:attrNameLst>
+                                      </p:cBhvr>
+                                      <p:to>
+                                        <p:strVal val="visible"/>
+                                      </p:to>
+                                    </p:set>
+                                  </p:childTnLst>
+                                </p:cTn>
+                              </p:par>
+                            </p:childTnLst>
+                          </p:cTn>
+                        </p:par>
+                        <p:par>
+                          <p:cTn id="28" fill="hold">
+                            <p:stCondLst>
+                              <p:cond delay="0"/>
+                            </p:stCondLst>
+                            <p:childTnLst>
+                              <p:par>
+                                <p:cTn id="29" presetID="1" presetClass="entr" presetSubtype="0" fill="hold" grpId="0" nodeType="afterEffect">
+                                  <p:stCondLst>
+                                    <p:cond delay="0"/>
+                                  </p:stCondLst>
+                                  <p:childTnLst>
+                                    <p:set>
+                                      <p:cBhvr>
+                                        <p:cTn id="30" dur="1" fill="hold">
+                                          <p:stCondLst>
+                                            <p:cond delay="0"/>
+                                          </p:stCondLst>
+                                        </p:cTn>
+                                        <p:tgtEl>
+                                          <p:spTgt spid="3">
+                                            <p:txEl>
+                                              <p:pRg st="6" end="6"/>
+                                            </p:txEl>
+                                          </p:spTgt>
+                                        </p:tgtEl>
+                                        <p:attrNameLst>
+                                          <p:attrName>style.visibility</p:attrName>
+                                        </p:attrNameLst>
+                                      </p:cBhvr>
+                                      <p:to>
+                                        <p:strVal val="visible"/>
+                                      </p:to>
+                                    </p:set>
+                                  </p:childTnLst>
+                                </p:cTn>
+                              </p:par>
+                            </p:childTnLst>
+                          </p:cTn>
+                        </p:par>
+                        <p:par>
+                          <p:cTn id="31" fill="hold">
+                            <p:stCondLst>
+                              <p:cond delay="0"/>
+                            </p:stCondLst>
+                            <p:childTnLst>
+                              <p:par>
+                                <p:cTn id="32" presetID="1" presetClass="entr" presetSubtype="0" fill="hold" grpId="0" nodeType="afterEffect">
+                                  <p:stCondLst>
+                                    <p:cond delay="0"/>
+                                  </p:stCondLst>
+                                  <p:childTnLst>
+                                    <p:set>
+                                      <p:cBhvr>
+                                        <p:cTn id="33" dur="1" fill="hold">
+                                          <p:stCondLst>
+                                            <p:cond delay="0"/>
+                                          </p:stCondLst>
+                                        </p:cTn>
+                                        <p:tgtEl>
+                                          <p:spTgt spid="3">
+                                            <p:txEl>
+                                              <p:pRg st="7" end="7"/>
+                                            </p:txEl>
+                                          </p:spTgt>
+                                        </p:tgtEl>
+                                        <p:attrNameLst>
+                                          <p:attrName>style.visibility</p:attrName>
+                                        </p:attrNameLst>
+                                      </p:cBhvr>
+                                      <p:to>
+                                        <p:strVal val="visible"/>
+                                      </p:to>
+                                    </p:set>
+                                  </p:childTnLst>
+                                </p:cTn>
+                              </p:par>
+                            </p:childTnLst>
+                          </p:cTn>
+                        </p:par>
+                        <p:par>
+                          <p:cTn id="34" fill="hold">
+                            <p:stCondLst>
+                              <p:cond delay="0"/>
+                            </p:stCondLst>
+                            <p:childTnLst>
+                              <p:par>
+                                <p:cTn id="35" presetID="1" presetClass="entr" presetSubtype="0" fill="hold" grpId="0" nodeType="afterEffect">
+                                  <p:stCondLst>
+                                    <p:cond delay="0"/>
+                                  </p:stCondLst>
+                                  <p:childTnLst>
+                                    <p:set>
+                                      <p:cBhvr>
+                                        <p:cTn id="36" dur="1" fill="hold">
+                                          <p:stCondLst>
+                                            <p:cond delay="0"/>
+                                          </p:stCondLst>
+                                        </p:cTn>
+                                        <p:tgtEl>
+                                          <p:spTgt spid="3">
+                                            <p:txEl>
+                                              <p:pRg st="8" end="8"/>
+                                            </p:txEl>
+                                          </p:spTgt>
+                                        </p:tgtEl>
+                                        <p:attrNameLst>
+                                          <p:attrName>style.visibility</p:attrName>
+                                        </p:attrNameLst>
+                                      </p:cBhvr>
+                                      <p:to>
+                                        <p:strVal val="visible"/>
+                                      </p:to>
+                                    </p:set>
+                                  </p:childTnLst>
+                                </p:cTn>
+                              </p:par>
+                            </p:childTnLst>
+                          </p:cTn>
+                        </p:par>
+                      </p:childTnLst>
+                    </p:cTn>
+                  </p:par>
+                </p:childTnLst>
+              </p:cTn>
+              <p:prevCondLst>
+                <p:cond evt="onPrev" delay="0">
+                  <p:tgtEl>
+                    <p:sldTgt/>
+                  </p:tgtEl>
+                </p:cond>
+              </p:prevCondLst>
+              <p:nextCondLst>
+                <p:cond evt="onNext" delay="0">
+                  <p:tgtEl>
+                    <p:sldTgt/>
+                  </p:tgtEl>
+                </p:cond>
+              </p:nextCondLst>
+            </p:seq>
+          </p:childTnLst>
+        </p:cTn>
+      </p:par>
+    </p:tnLst>
+    <p:bldLst>
+      <p:bldP spid="2" grpId="0"/>
+      <p:bldP spid="3" grpId="0" build="p"/>
+    </p:bldLst>
+  </p:timing>
 </p:sld>
 </file>
 
@@ -3419,13 +5345,13 @@
           <a:p>
             <a:r>
               <a:rPr lang="en-US" dirty="0"/>
-              <a:t>Pull up test coverage = amount of total pull up resistors / Base</a:t>
-            </a:r>
-          </a:p>
-          <a:p>
-            <a:r>
-              <a:rPr lang="en-US" dirty="0"/>
-              <a:t>Pull down test coverage = amount of total pull down resistors / Base</a:t>
+              <a:t>Pull up test coverage = amount of total pull up resistor nets / Base</a:t>
+            </a:r>
+          </a:p>
+          <a:p>
+            <a:r>
+              <a:rPr lang="en-US" dirty="0"/>
+              <a:t>Pull down test coverage = amount of total pull down resistor nets / Base</a:t>
             </a:r>
           </a:p>
           <a:p>
@@ -3479,7 +5405,15 @@
             </a:r>
             <a:r>
               <a:rPr lang="de-DE" dirty="0" err="1"/>
-              <a:t>components</a:t>
+              <a:t>component</a:t>
+            </a:r>
+            <a:r>
+              <a:rPr lang="de-DE" dirty="0"/>
+              <a:t> </a:t>
+            </a:r>
+            <a:r>
+              <a:rPr lang="de-DE" dirty="0" err="1"/>
+              <a:t>nets</a:t>
             </a:r>
             <a:r>
               <a:rPr lang="de-DE" dirty="0"/>
@@ -3527,6 +5461,285 @@
   <p:clrMapOvr>
     <a:masterClrMapping/>
   </p:clrMapOvr>
+  <p:timing>
+    <p:tnLst>
+      <p:par>
+        <p:cTn id="1" dur="indefinite" restart="never" nodeType="tmRoot">
+          <p:childTnLst>
+            <p:seq concurrent="1" nextAc="seek">
+              <p:cTn id="2" dur="indefinite" nodeType="mainSeq">
+                <p:childTnLst>
+                  <p:par>
+                    <p:cTn id="3" fill="hold">
+                      <p:stCondLst>
+                        <p:cond delay="indefinite"/>
+                      </p:stCondLst>
+                      <p:childTnLst>
+                        <p:par>
+                          <p:cTn id="4" fill="hold">
+                            <p:stCondLst>
+                              <p:cond delay="0"/>
+                            </p:stCondLst>
+                            <p:childTnLst>
+                              <p:par>
+                                <p:cTn id="5" presetID="1" presetClass="entr" presetSubtype="0" fill="hold" grpId="0" nodeType="clickEffect">
+                                  <p:stCondLst>
+                                    <p:cond delay="0"/>
+                                  </p:stCondLst>
+                                  <p:childTnLst>
+                                    <p:set>
+                                      <p:cBhvr>
+                                        <p:cTn id="6" dur="1" fill="hold">
+                                          <p:stCondLst>
+                                            <p:cond delay="0"/>
+                                          </p:stCondLst>
+                                        </p:cTn>
+                                        <p:tgtEl>
+                                          <p:spTgt spid="2"/>
+                                        </p:tgtEl>
+                                        <p:attrNameLst>
+                                          <p:attrName>style.visibility</p:attrName>
+                                        </p:attrNameLst>
+                                      </p:cBhvr>
+                                      <p:to>
+                                        <p:strVal val="visible"/>
+                                      </p:to>
+                                    </p:set>
+                                  </p:childTnLst>
+                                </p:cTn>
+                              </p:par>
+                            </p:childTnLst>
+                          </p:cTn>
+                        </p:par>
+                        <p:par>
+                          <p:cTn id="7" fill="hold">
+                            <p:stCondLst>
+                              <p:cond delay="0"/>
+                            </p:stCondLst>
+                            <p:childTnLst>
+                              <p:par>
+                                <p:cTn id="8" presetID="1" presetClass="entr" presetSubtype="0" fill="hold" grpId="0" nodeType="afterEffect">
+                                  <p:stCondLst>
+                                    <p:cond delay="0"/>
+                                  </p:stCondLst>
+                                  <p:childTnLst>
+                                    <p:set>
+                                      <p:cBhvr>
+                                        <p:cTn id="9" dur="1" fill="hold">
+                                          <p:stCondLst>
+                                            <p:cond delay="0"/>
+                                          </p:stCondLst>
+                                        </p:cTn>
+                                        <p:tgtEl>
+                                          <p:spTgt spid="3">
+                                            <p:txEl>
+                                              <p:pRg st="0" end="0"/>
+                                            </p:txEl>
+                                          </p:spTgt>
+                                        </p:tgtEl>
+                                        <p:attrNameLst>
+                                          <p:attrName>style.visibility</p:attrName>
+                                        </p:attrNameLst>
+                                      </p:cBhvr>
+                                      <p:to>
+                                        <p:strVal val="visible"/>
+                                      </p:to>
+                                    </p:set>
+                                  </p:childTnLst>
+                                </p:cTn>
+                              </p:par>
+                            </p:childTnLst>
+                          </p:cTn>
+                        </p:par>
+                        <p:par>
+                          <p:cTn id="10" fill="hold">
+                            <p:stCondLst>
+                              <p:cond delay="0"/>
+                            </p:stCondLst>
+                            <p:childTnLst>
+                              <p:par>
+                                <p:cTn id="11" presetID="1" presetClass="entr" presetSubtype="0" fill="hold" grpId="0" nodeType="afterEffect">
+                                  <p:stCondLst>
+                                    <p:cond delay="0"/>
+                                  </p:stCondLst>
+                                  <p:childTnLst>
+                                    <p:set>
+                                      <p:cBhvr>
+                                        <p:cTn id="12" dur="1" fill="hold">
+                                          <p:stCondLst>
+                                            <p:cond delay="0"/>
+                                          </p:stCondLst>
+                                        </p:cTn>
+                                        <p:tgtEl>
+                                          <p:spTgt spid="3">
+                                            <p:txEl>
+                                              <p:pRg st="1" end="1"/>
+                                            </p:txEl>
+                                          </p:spTgt>
+                                        </p:tgtEl>
+                                        <p:attrNameLst>
+                                          <p:attrName>style.visibility</p:attrName>
+                                        </p:attrNameLst>
+                                      </p:cBhvr>
+                                      <p:to>
+                                        <p:strVal val="visible"/>
+                                      </p:to>
+                                    </p:set>
+                                  </p:childTnLst>
+                                </p:cTn>
+                              </p:par>
+                            </p:childTnLst>
+                          </p:cTn>
+                        </p:par>
+                        <p:par>
+                          <p:cTn id="13" fill="hold">
+                            <p:stCondLst>
+                              <p:cond delay="0"/>
+                            </p:stCondLst>
+                            <p:childTnLst>
+                              <p:par>
+                                <p:cTn id="14" presetID="1" presetClass="entr" presetSubtype="0" fill="hold" grpId="0" nodeType="afterEffect">
+                                  <p:stCondLst>
+                                    <p:cond delay="0"/>
+                                  </p:stCondLst>
+                                  <p:childTnLst>
+                                    <p:set>
+                                      <p:cBhvr>
+                                        <p:cTn id="15" dur="1" fill="hold">
+                                          <p:stCondLst>
+                                            <p:cond delay="0"/>
+                                          </p:stCondLst>
+                                        </p:cTn>
+                                        <p:tgtEl>
+                                          <p:spTgt spid="3">
+                                            <p:txEl>
+                                              <p:pRg st="2" end="2"/>
+                                            </p:txEl>
+                                          </p:spTgt>
+                                        </p:tgtEl>
+                                        <p:attrNameLst>
+                                          <p:attrName>style.visibility</p:attrName>
+                                        </p:attrNameLst>
+                                      </p:cBhvr>
+                                      <p:to>
+                                        <p:strVal val="visible"/>
+                                      </p:to>
+                                    </p:set>
+                                  </p:childTnLst>
+                                </p:cTn>
+                              </p:par>
+                            </p:childTnLst>
+                          </p:cTn>
+                        </p:par>
+                        <p:par>
+                          <p:cTn id="16" fill="hold">
+                            <p:stCondLst>
+                              <p:cond delay="0"/>
+                            </p:stCondLst>
+                            <p:childTnLst>
+                              <p:par>
+                                <p:cTn id="17" presetID="1" presetClass="entr" presetSubtype="0" fill="hold" grpId="0" nodeType="afterEffect">
+                                  <p:stCondLst>
+                                    <p:cond delay="0"/>
+                                  </p:stCondLst>
+                                  <p:childTnLst>
+                                    <p:set>
+                                      <p:cBhvr>
+                                        <p:cTn id="18" dur="1" fill="hold">
+                                          <p:stCondLst>
+                                            <p:cond delay="0"/>
+                                          </p:stCondLst>
+                                        </p:cTn>
+                                        <p:tgtEl>
+                                          <p:spTgt spid="3">
+                                            <p:txEl>
+                                              <p:pRg st="3" end="3"/>
+                                            </p:txEl>
+                                          </p:spTgt>
+                                        </p:tgtEl>
+                                        <p:attrNameLst>
+                                          <p:attrName>style.visibility</p:attrName>
+                                        </p:attrNameLst>
+                                      </p:cBhvr>
+                                      <p:to>
+                                        <p:strVal val="visible"/>
+                                      </p:to>
+                                    </p:set>
+                                  </p:childTnLst>
+                                </p:cTn>
+                              </p:par>
+                            </p:childTnLst>
+                          </p:cTn>
+                        </p:par>
+                        <p:par>
+                          <p:cTn id="19" fill="hold">
+                            <p:stCondLst>
+                              <p:cond delay="0"/>
+                            </p:stCondLst>
+                            <p:childTnLst>
+                              <p:par>
+                                <p:cTn id="20" presetID="1" presetClass="entr" presetSubtype="0" fill="hold" grpId="0" nodeType="afterEffect">
+                                  <p:stCondLst>
+                                    <p:cond delay="0"/>
+                                  </p:stCondLst>
+                                  <p:childTnLst>
+                                    <p:set>
+                                      <p:cBhvr>
+                                        <p:cTn id="21" dur="1" fill="hold">
+                                          <p:stCondLst>
+                                            <p:cond delay="0"/>
+                                          </p:stCondLst>
+                                        </p:cTn>
+                                        <p:tgtEl>
+                                          <p:spTgt spid="3">
+                                            <p:txEl>
+                                              <p:pRg st="4" end="4"/>
+                                            </p:txEl>
+                                          </p:spTgt>
+                                        </p:tgtEl>
+                                        <p:attrNameLst>
+                                          <p:attrName>style.visibility</p:attrName>
+                                        </p:attrNameLst>
+                                      </p:cBhvr>
+                                      <p:to>
+                                        <p:strVal val="visible"/>
+                                      </p:to>
+                                    </p:set>
+                                  </p:childTnLst>
+                                </p:cTn>
+                              </p:par>
+                            </p:childTnLst>
+                          </p:cTn>
+                        </p:par>
+                      </p:childTnLst>
+                    </p:cTn>
+                  </p:par>
+                </p:childTnLst>
+              </p:cTn>
+              <p:prevCondLst>
+                <p:cond evt="onPrev" delay="0">
+                  <p:tgtEl>
+                    <p:sldTgt/>
+                  </p:tgtEl>
+                </p:cond>
+              </p:prevCondLst>
+              <p:nextCondLst>
+                <p:cond evt="onNext" delay="0">
+                  <p:tgtEl>
+                    <p:sldTgt/>
+                  </p:tgtEl>
+                </p:cond>
+              </p:nextCondLst>
+            </p:seq>
+          </p:childTnLst>
+        </p:cTn>
+      </p:par>
+    </p:tnLst>
+    <p:bldLst>
+      <p:bldP spid="2" grpId="0"/>
+      <p:bldP spid="3" grpId="0" build="p"/>
+    </p:bldLst>
+  </p:timing>
 </p:sld>
 </file>
 
@@ -3889,6 +6102,157 @@
   <p:clrMapOvr>
     <a:masterClrMapping/>
   </p:clrMapOvr>
+  <p:timing>
+    <p:tnLst>
+      <p:par>
+        <p:cTn id="1" dur="indefinite" restart="never" nodeType="tmRoot">
+          <p:childTnLst>
+            <p:seq concurrent="1" nextAc="seek">
+              <p:cTn id="2" dur="indefinite" nodeType="mainSeq">
+                <p:childTnLst>
+                  <p:par>
+                    <p:cTn id="3" fill="hold">
+                      <p:stCondLst>
+                        <p:cond delay="indefinite"/>
+                      </p:stCondLst>
+                      <p:childTnLst>
+                        <p:par>
+                          <p:cTn id="4" fill="hold">
+                            <p:stCondLst>
+                              <p:cond delay="0"/>
+                            </p:stCondLst>
+                            <p:childTnLst>
+                              <p:par>
+                                <p:cTn id="5" presetID="1" presetClass="entr" presetSubtype="0" fill="hold" grpId="0" nodeType="clickEffect">
+                                  <p:stCondLst>
+                                    <p:cond delay="0"/>
+                                  </p:stCondLst>
+                                  <p:childTnLst>
+                                    <p:set>
+                                      <p:cBhvr>
+                                        <p:cTn id="6" dur="1" fill="hold">
+                                          <p:stCondLst>
+                                            <p:cond delay="0"/>
+                                          </p:stCondLst>
+                                        </p:cTn>
+                                        <p:tgtEl>
+                                          <p:spTgt spid="2"/>
+                                        </p:tgtEl>
+                                        <p:attrNameLst>
+                                          <p:attrName>style.visibility</p:attrName>
+                                        </p:attrNameLst>
+                                      </p:cBhvr>
+                                      <p:to>
+                                        <p:strVal val="visible"/>
+                                      </p:to>
+                                    </p:set>
+                                  </p:childTnLst>
+                                </p:cTn>
+                              </p:par>
+                            </p:childTnLst>
+                          </p:cTn>
+                        </p:par>
+                        <p:par>
+                          <p:cTn id="7" fill="hold">
+                            <p:stCondLst>
+                              <p:cond delay="0"/>
+                            </p:stCondLst>
+                            <p:childTnLst>
+                              <p:par>
+                                <p:cTn id="8" presetID="1" presetClass="entr" presetSubtype="0" fill="hold" nodeType="afterEffect">
+                                  <p:stCondLst>
+                                    <p:cond delay="0"/>
+                                  </p:stCondLst>
+                                  <p:childTnLst>
+                                    <p:set>
+                                      <p:cBhvr>
+                                        <p:cTn id="9" dur="1" fill="hold">
+                                          <p:stCondLst>
+                                            <p:cond delay="0"/>
+                                          </p:stCondLst>
+                                        </p:cTn>
+                                        <p:tgtEl>
+                                          <p:spTgt spid="6"/>
+                                        </p:tgtEl>
+                                        <p:attrNameLst>
+                                          <p:attrName>style.visibility</p:attrName>
+                                        </p:attrNameLst>
+                                      </p:cBhvr>
+                                      <p:to>
+                                        <p:strVal val="visible"/>
+                                      </p:to>
+                                    </p:set>
+                                  </p:childTnLst>
+                                </p:cTn>
+                              </p:par>
+                            </p:childTnLst>
+                          </p:cTn>
+                        </p:par>
+                        <p:par>
+                          <p:cTn id="10" fill="hold">
+                            <p:stCondLst>
+                              <p:cond delay="0"/>
+                            </p:stCondLst>
+                            <p:childTnLst>
+                              <p:par>
+                                <p:cTn id="11" presetID="1" presetClass="entr" presetSubtype="0" fill="hold" grpId="0" nodeType="afterEffect">
+                                  <p:stCondLst>
+                                    <p:cond delay="0"/>
+                                  </p:stCondLst>
+                                  <p:childTnLst>
+                                    <p:set>
+                                      <p:cBhvr>
+                                        <p:cTn id="12" dur="1" fill="hold">
+                                          <p:stCondLst>
+                                            <p:cond delay="0"/>
+                                          </p:stCondLst>
+                                        </p:cTn>
+                                        <p:tgtEl>
+                                          <p:spTgt spid="7"/>
+                                        </p:tgtEl>
+                                        <p:attrNameLst>
+                                          <p:attrName>style.visibility</p:attrName>
+                                        </p:attrNameLst>
+                                      </p:cBhvr>
+                                      <p:to>
+                                        <p:strVal val="visible"/>
+                                      </p:to>
+                                    </p:set>
+                                  </p:childTnLst>
+                                </p:cTn>
+                              </p:par>
+                            </p:childTnLst>
+                          </p:cTn>
+                        </p:par>
+                      </p:childTnLst>
+                    </p:cTn>
+                  </p:par>
+                </p:childTnLst>
+              </p:cTn>
+              <p:prevCondLst>
+                <p:cond evt="onPrev" delay="0">
+                  <p:tgtEl>
+                    <p:sldTgt/>
+                  </p:tgtEl>
+                </p:cond>
+              </p:prevCondLst>
+              <p:nextCondLst>
+                <p:cond evt="onNext" delay="0">
+                  <p:tgtEl>
+                    <p:sldTgt/>
+                  </p:tgtEl>
+                </p:cond>
+              </p:nextCondLst>
+            </p:seq>
+          </p:childTnLst>
+        </p:cTn>
+      </p:par>
+    </p:tnLst>
+    <p:bldLst>
+      <p:bldP spid="2" grpId="0"/>
+      <p:bldP spid="7" grpId="0"/>
+    </p:bldLst>
+  </p:timing>
 </p:sld>
 </file>
 
@@ -4293,6 +6657,157 @@
   <p:clrMapOvr>
     <a:masterClrMapping/>
   </p:clrMapOvr>
+  <p:timing>
+    <p:tnLst>
+      <p:par>
+        <p:cTn id="1" dur="indefinite" restart="never" nodeType="tmRoot">
+          <p:childTnLst>
+            <p:seq concurrent="1" nextAc="seek">
+              <p:cTn id="2" dur="indefinite" nodeType="mainSeq">
+                <p:childTnLst>
+                  <p:par>
+                    <p:cTn id="3" fill="hold">
+                      <p:stCondLst>
+                        <p:cond delay="indefinite"/>
+                      </p:stCondLst>
+                      <p:childTnLst>
+                        <p:par>
+                          <p:cTn id="4" fill="hold">
+                            <p:stCondLst>
+                              <p:cond delay="0"/>
+                            </p:stCondLst>
+                            <p:childTnLst>
+                              <p:par>
+                                <p:cTn id="5" presetID="1" presetClass="entr" presetSubtype="0" fill="hold" grpId="0" nodeType="clickEffect">
+                                  <p:stCondLst>
+                                    <p:cond delay="0"/>
+                                  </p:stCondLst>
+                                  <p:childTnLst>
+                                    <p:set>
+                                      <p:cBhvr>
+                                        <p:cTn id="6" dur="1" fill="hold">
+                                          <p:stCondLst>
+                                            <p:cond delay="0"/>
+                                          </p:stCondLst>
+                                        </p:cTn>
+                                        <p:tgtEl>
+                                          <p:spTgt spid="2"/>
+                                        </p:tgtEl>
+                                        <p:attrNameLst>
+                                          <p:attrName>style.visibility</p:attrName>
+                                        </p:attrNameLst>
+                                      </p:cBhvr>
+                                      <p:to>
+                                        <p:strVal val="visible"/>
+                                      </p:to>
+                                    </p:set>
+                                  </p:childTnLst>
+                                </p:cTn>
+                              </p:par>
+                            </p:childTnLst>
+                          </p:cTn>
+                        </p:par>
+                        <p:par>
+                          <p:cTn id="7" fill="hold">
+                            <p:stCondLst>
+                              <p:cond delay="0"/>
+                            </p:stCondLst>
+                            <p:childTnLst>
+                              <p:par>
+                                <p:cTn id="8" presetID="1" presetClass="entr" presetSubtype="0" fill="hold" nodeType="afterEffect">
+                                  <p:stCondLst>
+                                    <p:cond delay="0"/>
+                                  </p:stCondLst>
+                                  <p:childTnLst>
+                                    <p:set>
+                                      <p:cBhvr>
+                                        <p:cTn id="9" dur="1" fill="hold">
+                                          <p:stCondLst>
+                                            <p:cond delay="0"/>
+                                          </p:stCondLst>
+                                        </p:cTn>
+                                        <p:tgtEl>
+                                          <p:spTgt spid="6"/>
+                                        </p:tgtEl>
+                                        <p:attrNameLst>
+                                          <p:attrName>style.visibility</p:attrName>
+                                        </p:attrNameLst>
+                                      </p:cBhvr>
+                                      <p:to>
+                                        <p:strVal val="visible"/>
+                                      </p:to>
+                                    </p:set>
+                                  </p:childTnLst>
+                                </p:cTn>
+                              </p:par>
+                            </p:childTnLst>
+                          </p:cTn>
+                        </p:par>
+                        <p:par>
+                          <p:cTn id="10" fill="hold">
+                            <p:stCondLst>
+                              <p:cond delay="0"/>
+                            </p:stCondLst>
+                            <p:childTnLst>
+                              <p:par>
+                                <p:cTn id="11" presetID="1" presetClass="entr" presetSubtype="0" fill="hold" grpId="0" nodeType="afterEffect">
+                                  <p:stCondLst>
+                                    <p:cond delay="0"/>
+                                  </p:stCondLst>
+                                  <p:childTnLst>
+                                    <p:set>
+                                      <p:cBhvr>
+                                        <p:cTn id="12" dur="1" fill="hold">
+                                          <p:stCondLst>
+                                            <p:cond delay="0"/>
+                                          </p:stCondLst>
+                                        </p:cTn>
+                                        <p:tgtEl>
+                                          <p:spTgt spid="7"/>
+                                        </p:tgtEl>
+                                        <p:attrNameLst>
+                                          <p:attrName>style.visibility</p:attrName>
+                                        </p:attrNameLst>
+                                      </p:cBhvr>
+                                      <p:to>
+                                        <p:strVal val="visible"/>
+                                      </p:to>
+                                    </p:set>
+                                  </p:childTnLst>
+                                </p:cTn>
+                              </p:par>
+                            </p:childTnLst>
+                          </p:cTn>
+                        </p:par>
+                      </p:childTnLst>
+                    </p:cTn>
+                  </p:par>
+                </p:childTnLst>
+              </p:cTn>
+              <p:prevCondLst>
+                <p:cond evt="onPrev" delay="0">
+                  <p:tgtEl>
+                    <p:sldTgt/>
+                  </p:tgtEl>
+                </p:cond>
+              </p:prevCondLst>
+              <p:nextCondLst>
+                <p:cond evt="onNext" delay="0">
+                  <p:tgtEl>
+                    <p:sldTgt/>
+                  </p:tgtEl>
+                </p:cond>
+              </p:nextCondLst>
+            </p:seq>
+          </p:childTnLst>
+        </p:cTn>
+      </p:par>
+    </p:tnLst>
+    <p:bldLst>
+      <p:bldP spid="2" grpId="0"/>
+      <p:bldP spid="7" grpId="0"/>
+    </p:bldLst>
+  </p:timing>
 </p:sld>
 </file>
 
@@ -4419,6 +6934,165 @@
   <p:clrMapOvr>
     <a:masterClrMapping/>
   </p:clrMapOvr>
+  <p:timing>
+    <p:tnLst>
+      <p:par>
+        <p:cTn id="1" dur="indefinite" restart="never" nodeType="tmRoot">
+          <p:childTnLst>
+            <p:seq concurrent="1" nextAc="seek">
+              <p:cTn id="2" dur="indefinite" nodeType="mainSeq">
+                <p:childTnLst>
+                  <p:par>
+                    <p:cTn id="3" fill="hold">
+                      <p:stCondLst>
+                        <p:cond delay="indefinite"/>
+                      </p:stCondLst>
+                      <p:childTnLst>
+                        <p:par>
+                          <p:cTn id="4" fill="hold">
+                            <p:stCondLst>
+                              <p:cond delay="0"/>
+                            </p:stCondLst>
+                            <p:childTnLst>
+                              <p:par>
+                                <p:cTn id="5" presetID="1" presetClass="entr" presetSubtype="0" fill="hold" grpId="0" nodeType="clickEffect">
+                                  <p:stCondLst>
+                                    <p:cond delay="0"/>
+                                  </p:stCondLst>
+                                  <p:childTnLst>
+                                    <p:set>
+                                      <p:cBhvr>
+                                        <p:cTn id="6" dur="1" fill="hold">
+                                          <p:stCondLst>
+                                            <p:cond delay="0"/>
+                                          </p:stCondLst>
+                                        </p:cTn>
+                                        <p:tgtEl>
+                                          <p:spTgt spid="2"/>
+                                        </p:tgtEl>
+                                        <p:attrNameLst>
+                                          <p:attrName>style.visibility</p:attrName>
+                                        </p:attrNameLst>
+                                      </p:cBhvr>
+                                      <p:to>
+                                        <p:strVal val="visible"/>
+                                      </p:to>
+                                    </p:set>
+                                  </p:childTnLst>
+                                </p:cTn>
+                              </p:par>
+                            </p:childTnLst>
+                          </p:cTn>
+                        </p:par>
+                        <p:par>
+                          <p:cTn id="7" fill="hold">
+                            <p:stCondLst>
+                              <p:cond delay="0"/>
+                            </p:stCondLst>
+                            <p:childTnLst>
+                              <p:par>
+                                <p:cTn id="8" presetID="1" presetClass="entr" presetSubtype="0" fill="hold" grpId="0" nodeType="afterEffect">
+                                  <p:stCondLst>
+                                    <p:cond delay="0"/>
+                                  </p:stCondLst>
+                                  <p:childTnLst>
+                                    <p:set>
+                                      <p:cBhvr>
+                                        <p:cTn id="9" dur="1" fill="hold">
+                                          <p:stCondLst>
+                                            <p:cond delay="0"/>
+                                          </p:stCondLst>
+                                        </p:cTn>
+                                        <p:tgtEl>
+                                          <p:spTgt spid="3">
+                                            <p:txEl>
+                                              <p:pRg st="0" end="0"/>
+                                            </p:txEl>
+                                          </p:spTgt>
+                                        </p:tgtEl>
+                                        <p:attrNameLst>
+                                          <p:attrName>style.visibility</p:attrName>
+                                        </p:attrNameLst>
+                                      </p:cBhvr>
+                                      <p:to>
+                                        <p:strVal val="visible"/>
+                                      </p:to>
+                                    </p:set>
+                                  </p:childTnLst>
+                                </p:cTn>
+                              </p:par>
+                            </p:childTnLst>
+                          </p:cTn>
+                        </p:par>
+                        <p:par>
+                          <p:cTn id="10" fill="hold">
+                            <p:stCondLst>
+                              <p:cond delay="0"/>
+                            </p:stCondLst>
+                            <p:childTnLst>
+                              <p:par>
+                                <p:cTn id="11" presetID="1" presetClass="entr" presetSubtype="0" fill="hold" grpId="0" nodeType="afterEffect">
+                                  <p:stCondLst>
+                                    <p:cond delay="0"/>
+                                  </p:stCondLst>
+                                  <p:childTnLst>
+                                    <p:set>
+                                      <p:cBhvr>
+                                        <p:cTn id="12" dur="1" fill="hold">
+                                          <p:stCondLst>
+                                            <p:cond delay="0"/>
+                                          </p:stCondLst>
+                                        </p:cTn>
+                                        <p:tgtEl>
+                                          <p:spTgt spid="3">
+                                            <p:txEl>
+                                              <p:pRg st="1" end="1"/>
+                                            </p:txEl>
+                                          </p:spTgt>
+                                        </p:tgtEl>
+                                        <p:attrNameLst>
+                                          <p:attrName>style.visibility</p:attrName>
+                                        </p:attrNameLst>
+                                      </p:cBhvr>
+                                      <p:to>
+                                        <p:strVal val="visible"/>
+                                      </p:to>
+                                    </p:set>
+                                  </p:childTnLst>
+                                </p:cTn>
+                              </p:par>
+                            </p:childTnLst>
+                          </p:cTn>
+                        </p:par>
+                      </p:childTnLst>
+                    </p:cTn>
+                  </p:par>
+                </p:childTnLst>
+              </p:cTn>
+              <p:prevCondLst>
+                <p:cond evt="onPrev" delay="0">
+                  <p:tgtEl>
+                    <p:sldTgt/>
+                  </p:tgtEl>
+                </p:cond>
+              </p:prevCondLst>
+              <p:nextCondLst>
+                <p:cond evt="onNext" delay="0">
+                  <p:tgtEl>
+                    <p:sldTgt/>
+                  </p:tgtEl>
+                </p:cond>
+              </p:nextCondLst>
+            </p:seq>
+          </p:childTnLst>
+        </p:cTn>
+      </p:par>
+    </p:tnLst>
+    <p:bldLst>
+      <p:bldP spid="2" grpId="0"/>
+      <p:bldP spid="3" grpId="0" build="p"/>
+    </p:bldLst>
+  </p:timing>
 </p:sld>
 </file>
 
@@ -4462,7 +7136,7 @@
           <a:p>
             <a:r>
               <a:rPr lang="en-US" dirty="0"/>
-              <a:t>Agenda</a:t>
+              <a:t>Content</a:t>
             </a:r>
           </a:p>
         </p:txBody>
@@ -4600,6 +7274,374 @@
   <p:clrMapOvr>
     <a:masterClrMapping/>
   </p:clrMapOvr>
+  <p:timing>
+    <p:tnLst>
+      <p:par>
+        <p:cTn id="1" dur="indefinite" restart="never" nodeType="tmRoot">
+          <p:childTnLst>
+            <p:seq concurrent="1" nextAc="seek">
+              <p:cTn id="2" dur="indefinite" nodeType="mainSeq">
+                <p:childTnLst>
+                  <p:par>
+                    <p:cTn id="3" fill="hold">
+                      <p:stCondLst>
+                        <p:cond delay="indefinite"/>
+                      </p:stCondLst>
+                      <p:childTnLst>
+                        <p:par>
+                          <p:cTn id="4" fill="hold">
+                            <p:stCondLst>
+                              <p:cond delay="0"/>
+                            </p:stCondLst>
+                            <p:childTnLst>
+                              <p:par>
+                                <p:cTn id="5" presetID="1" presetClass="entr" presetSubtype="0" fill="hold" grpId="0" nodeType="clickEffect">
+                                  <p:stCondLst>
+                                    <p:cond delay="0"/>
+                                  </p:stCondLst>
+                                  <p:childTnLst>
+                                    <p:set>
+                                      <p:cBhvr>
+                                        <p:cTn id="6" dur="1" fill="hold">
+                                          <p:stCondLst>
+                                            <p:cond delay="0"/>
+                                          </p:stCondLst>
+                                        </p:cTn>
+                                        <p:tgtEl>
+                                          <p:spTgt spid="2"/>
+                                        </p:tgtEl>
+                                        <p:attrNameLst>
+                                          <p:attrName>style.visibility</p:attrName>
+                                        </p:attrNameLst>
+                                      </p:cBhvr>
+                                      <p:to>
+                                        <p:strVal val="visible"/>
+                                      </p:to>
+                                    </p:set>
+                                  </p:childTnLst>
+                                </p:cTn>
+                              </p:par>
+                            </p:childTnLst>
+                          </p:cTn>
+                        </p:par>
+                      </p:childTnLst>
+                    </p:cTn>
+                  </p:par>
+                  <p:par>
+                    <p:cTn id="7" fill="hold">
+                      <p:stCondLst>
+                        <p:cond delay="indefinite"/>
+                      </p:stCondLst>
+                      <p:childTnLst>
+                        <p:par>
+                          <p:cTn id="8" fill="hold">
+                            <p:stCondLst>
+                              <p:cond delay="0"/>
+                            </p:stCondLst>
+                            <p:childTnLst>
+                              <p:par>
+                                <p:cTn id="9" presetID="1" presetClass="entr" presetSubtype="0" fill="hold" grpId="0" nodeType="clickEffect">
+                                  <p:stCondLst>
+                                    <p:cond delay="0"/>
+                                  </p:stCondLst>
+                                  <p:childTnLst>
+                                    <p:set>
+                                      <p:cBhvr>
+                                        <p:cTn id="10" dur="1" fill="hold">
+                                          <p:stCondLst>
+                                            <p:cond delay="0"/>
+                                          </p:stCondLst>
+                                        </p:cTn>
+                                        <p:tgtEl>
+                                          <p:spTgt spid="3">
+                                            <p:txEl>
+                                              <p:pRg st="0" end="0"/>
+                                            </p:txEl>
+                                          </p:spTgt>
+                                        </p:tgtEl>
+                                        <p:attrNameLst>
+                                          <p:attrName>style.visibility</p:attrName>
+                                        </p:attrNameLst>
+                                      </p:cBhvr>
+                                      <p:to>
+                                        <p:strVal val="visible"/>
+                                      </p:to>
+                                    </p:set>
+                                  </p:childTnLst>
+                                </p:cTn>
+                              </p:par>
+                            </p:childTnLst>
+                          </p:cTn>
+                        </p:par>
+                        <p:par>
+                          <p:cTn id="11" fill="hold">
+                            <p:stCondLst>
+                              <p:cond delay="0"/>
+                            </p:stCondLst>
+                            <p:childTnLst>
+                              <p:par>
+                                <p:cTn id="12" presetID="1" presetClass="entr" presetSubtype="0" fill="hold" grpId="0" nodeType="afterEffect">
+                                  <p:stCondLst>
+                                    <p:cond delay="0"/>
+                                  </p:stCondLst>
+                                  <p:childTnLst>
+                                    <p:set>
+                                      <p:cBhvr>
+                                        <p:cTn id="13" dur="1" fill="hold">
+                                          <p:stCondLst>
+                                            <p:cond delay="0"/>
+                                          </p:stCondLst>
+                                        </p:cTn>
+                                        <p:tgtEl>
+                                          <p:spTgt spid="3">
+                                            <p:txEl>
+                                              <p:pRg st="1" end="1"/>
+                                            </p:txEl>
+                                          </p:spTgt>
+                                        </p:tgtEl>
+                                        <p:attrNameLst>
+                                          <p:attrName>style.visibility</p:attrName>
+                                        </p:attrNameLst>
+                                      </p:cBhvr>
+                                      <p:to>
+                                        <p:strVal val="visible"/>
+                                      </p:to>
+                                    </p:set>
+                                  </p:childTnLst>
+                                </p:cTn>
+                              </p:par>
+                            </p:childTnLst>
+                          </p:cTn>
+                        </p:par>
+                        <p:par>
+                          <p:cTn id="14" fill="hold">
+                            <p:stCondLst>
+                              <p:cond delay="0"/>
+                            </p:stCondLst>
+                            <p:childTnLst>
+                              <p:par>
+                                <p:cTn id="15" presetID="1" presetClass="entr" presetSubtype="0" fill="hold" grpId="0" nodeType="afterEffect">
+                                  <p:stCondLst>
+                                    <p:cond delay="0"/>
+                                  </p:stCondLst>
+                                  <p:childTnLst>
+                                    <p:set>
+                                      <p:cBhvr>
+                                        <p:cTn id="16" dur="1" fill="hold">
+                                          <p:stCondLst>
+                                            <p:cond delay="0"/>
+                                          </p:stCondLst>
+                                        </p:cTn>
+                                        <p:tgtEl>
+                                          <p:spTgt spid="3">
+                                            <p:txEl>
+                                              <p:pRg st="2" end="2"/>
+                                            </p:txEl>
+                                          </p:spTgt>
+                                        </p:tgtEl>
+                                        <p:attrNameLst>
+                                          <p:attrName>style.visibility</p:attrName>
+                                        </p:attrNameLst>
+                                      </p:cBhvr>
+                                      <p:to>
+                                        <p:strVal val="visible"/>
+                                      </p:to>
+                                    </p:set>
+                                  </p:childTnLst>
+                                </p:cTn>
+                              </p:par>
+                            </p:childTnLst>
+                          </p:cTn>
+                        </p:par>
+                        <p:par>
+                          <p:cTn id="17" fill="hold">
+                            <p:stCondLst>
+                              <p:cond delay="0"/>
+                            </p:stCondLst>
+                            <p:childTnLst>
+                              <p:par>
+                                <p:cTn id="18" presetID="1" presetClass="entr" presetSubtype="0" fill="hold" grpId="0" nodeType="afterEffect">
+                                  <p:stCondLst>
+                                    <p:cond delay="0"/>
+                                  </p:stCondLst>
+                                  <p:childTnLst>
+                                    <p:set>
+                                      <p:cBhvr>
+                                        <p:cTn id="19" dur="1" fill="hold">
+                                          <p:stCondLst>
+                                            <p:cond delay="0"/>
+                                          </p:stCondLst>
+                                        </p:cTn>
+                                        <p:tgtEl>
+                                          <p:spTgt spid="3">
+                                            <p:txEl>
+                                              <p:pRg st="3" end="3"/>
+                                            </p:txEl>
+                                          </p:spTgt>
+                                        </p:tgtEl>
+                                        <p:attrNameLst>
+                                          <p:attrName>style.visibility</p:attrName>
+                                        </p:attrNameLst>
+                                      </p:cBhvr>
+                                      <p:to>
+                                        <p:strVal val="visible"/>
+                                      </p:to>
+                                    </p:set>
+                                  </p:childTnLst>
+                                </p:cTn>
+                              </p:par>
+                            </p:childTnLst>
+                          </p:cTn>
+                        </p:par>
+                        <p:par>
+                          <p:cTn id="20" fill="hold">
+                            <p:stCondLst>
+                              <p:cond delay="0"/>
+                            </p:stCondLst>
+                            <p:childTnLst>
+                              <p:par>
+                                <p:cTn id="21" presetID="1" presetClass="entr" presetSubtype="0" fill="hold" grpId="0" nodeType="afterEffect">
+                                  <p:stCondLst>
+                                    <p:cond delay="0"/>
+                                  </p:stCondLst>
+                                  <p:childTnLst>
+                                    <p:set>
+                                      <p:cBhvr>
+                                        <p:cTn id="22" dur="1" fill="hold">
+                                          <p:stCondLst>
+                                            <p:cond delay="0"/>
+                                          </p:stCondLst>
+                                        </p:cTn>
+                                        <p:tgtEl>
+                                          <p:spTgt spid="3">
+                                            <p:txEl>
+                                              <p:pRg st="4" end="4"/>
+                                            </p:txEl>
+                                          </p:spTgt>
+                                        </p:tgtEl>
+                                        <p:attrNameLst>
+                                          <p:attrName>style.visibility</p:attrName>
+                                        </p:attrNameLst>
+                                      </p:cBhvr>
+                                      <p:to>
+                                        <p:strVal val="visible"/>
+                                      </p:to>
+                                    </p:set>
+                                  </p:childTnLst>
+                                </p:cTn>
+                              </p:par>
+                            </p:childTnLst>
+                          </p:cTn>
+                        </p:par>
+                        <p:par>
+                          <p:cTn id="23" fill="hold">
+                            <p:stCondLst>
+                              <p:cond delay="0"/>
+                            </p:stCondLst>
+                            <p:childTnLst>
+                              <p:par>
+                                <p:cTn id="24" presetID="1" presetClass="entr" presetSubtype="0" fill="hold" grpId="0" nodeType="afterEffect">
+                                  <p:stCondLst>
+                                    <p:cond delay="0"/>
+                                  </p:stCondLst>
+                                  <p:childTnLst>
+                                    <p:set>
+                                      <p:cBhvr>
+                                        <p:cTn id="25" dur="1" fill="hold">
+                                          <p:stCondLst>
+                                            <p:cond delay="0"/>
+                                          </p:stCondLst>
+                                        </p:cTn>
+                                        <p:tgtEl>
+                                          <p:spTgt spid="3">
+                                            <p:txEl>
+                                              <p:pRg st="5" end="5"/>
+                                            </p:txEl>
+                                          </p:spTgt>
+                                        </p:tgtEl>
+                                        <p:attrNameLst>
+                                          <p:attrName>style.visibility</p:attrName>
+                                        </p:attrNameLst>
+                                      </p:cBhvr>
+                                      <p:to>
+                                        <p:strVal val="visible"/>
+                                      </p:to>
+                                    </p:set>
+                                  </p:childTnLst>
+                                </p:cTn>
+                              </p:par>
+                            </p:childTnLst>
+                          </p:cTn>
+                        </p:par>
+                        <p:par>
+                          <p:cTn id="26" fill="hold">
+                            <p:stCondLst>
+                              <p:cond delay="0"/>
+                            </p:stCondLst>
+                            <p:childTnLst>
+                              <p:par>
+                                <p:cTn id="27" presetID="1" presetClass="entr" presetSubtype="0" fill="hold" grpId="0" nodeType="afterEffect">
+                                  <p:stCondLst>
+                                    <p:cond delay="0"/>
+                                  </p:stCondLst>
+                                  <p:childTnLst>
+                                    <p:set>
+                                      <p:cBhvr>
+                                        <p:cTn id="28" dur="1" fill="hold">
+                                          <p:stCondLst>
+                                            <p:cond delay="0"/>
+                                          </p:stCondLst>
+                                        </p:cTn>
+                                        <p:tgtEl>
+                                          <p:spTgt spid="3">
+                                            <p:txEl>
+                                              <p:pRg st="6" end="6"/>
+                                            </p:txEl>
+                                          </p:spTgt>
+                                        </p:tgtEl>
+                                        <p:attrNameLst>
+                                          <p:attrName>style.visibility</p:attrName>
+                                        </p:attrNameLst>
+                                      </p:cBhvr>
+                                      <p:to>
+                                        <p:strVal val="visible"/>
+                                      </p:to>
+                                    </p:set>
+                                  </p:childTnLst>
+                                </p:cTn>
+                              </p:par>
+                            </p:childTnLst>
+                          </p:cTn>
+                        </p:par>
+                      </p:childTnLst>
+                    </p:cTn>
+                  </p:par>
+                </p:childTnLst>
+              </p:cTn>
+              <p:prevCondLst>
+                <p:cond evt="onPrev" delay="0">
+                  <p:tgtEl>
+                    <p:sldTgt/>
+                  </p:tgtEl>
+                </p:cond>
+              </p:prevCondLst>
+              <p:nextCondLst>
+                <p:cond evt="onNext" delay="0">
+                  <p:tgtEl>
+                    <p:sldTgt/>
+                  </p:tgtEl>
+                </p:cond>
+              </p:nextCondLst>
+            </p:seq>
+          </p:childTnLst>
+        </p:cTn>
+      </p:par>
+    </p:tnLst>
+    <p:bldLst>
+      <p:bldP spid="2" grpId="0"/>
+      <p:bldP spid="3" grpId="0" uiExpand="1" build="p"/>
+    </p:bldLst>
+  </p:timing>
 </p:sld>
 </file>
 
@@ -4717,6 +7759,125 @@
   <p:clrMapOvr>
     <a:masterClrMapping/>
   </p:clrMapOvr>
+  <p:timing>
+    <p:tnLst>
+      <p:par>
+        <p:cTn id="1" dur="indefinite" restart="never" nodeType="tmRoot">
+          <p:childTnLst>
+            <p:seq concurrent="1" nextAc="seek">
+              <p:cTn id="2" dur="indefinite" nodeType="mainSeq">
+                <p:childTnLst>
+                  <p:par>
+                    <p:cTn id="3" fill="hold">
+                      <p:stCondLst>
+                        <p:cond delay="indefinite"/>
+                      </p:stCondLst>
+                      <p:childTnLst>
+                        <p:par>
+                          <p:cTn id="4" fill="hold">
+                            <p:stCondLst>
+                              <p:cond delay="0"/>
+                            </p:stCondLst>
+                            <p:childTnLst>
+                              <p:par>
+                                <p:cTn id="5" presetID="1" presetClass="entr" presetSubtype="0" fill="hold" grpId="0" nodeType="clickEffect">
+                                  <p:stCondLst>
+                                    <p:cond delay="0"/>
+                                  </p:stCondLst>
+                                  <p:childTnLst>
+                                    <p:set>
+                                      <p:cBhvr>
+                                        <p:cTn id="6" dur="1" fill="hold">
+                                          <p:stCondLst>
+                                            <p:cond delay="0"/>
+                                          </p:stCondLst>
+                                        </p:cTn>
+                                        <p:tgtEl>
+                                          <p:spTgt spid="2"/>
+                                        </p:tgtEl>
+                                        <p:attrNameLst>
+                                          <p:attrName>style.visibility</p:attrName>
+                                        </p:attrNameLst>
+                                      </p:cBhvr>
+                                      <p:to>
+                                        <p:strVal val="visible"/>
+                                      </p:to>
+                                    </p:set>
+                                  </p:childTnLst>
+                                </p:cTn>
+                              </p:par>
+                            </p:childTnLst>
+                          </p:cTn>
+                        </p:par>
+                        <p:par>
+                          <p:cTn id="7" fill="hold">
+                            <p:stCondLst>
+                              <p:cond delay="0"/>
+                            </p:stCondLst>
+                            <p:childTnLst>
+                              <p:par>
+                                <p:cTn id="8" presetID="1" presetClass="entr" presetSubtype="0" fill="hold" grpId="0" nodeType="afterEffect">
+                                  <p:stCondLst>
+                                    <p:cond delay="0"/>
+                                  </p:stCondLst>
+                                  <p:childTnLst>
+                                    <p:set>
+                                      <p:cBhvr>
+                                        <p:cTn id="9" dur="1" fill="hold">
+                                          <p:stCondLst>
+                                            <p:cond delay="0"/>
+                                          </p:stCondLst>
+                                        </p:cTn>
+                                        <p:tgtEl>
+                                          <p:spTgt spid="3">
+                                            <p:txEl>
+                                              <p:pRg st="0" end="0"/>
+                                            </p:txEl>
+                                          </p:spTgt>
+                                        </p:tgtEl>
+                                        <p:attrNameLst>
+                                          <p:attrName>style.visibility</p:attrName>
+                                        </p:attrNameLst>
+                                      </p:cBhvr>
+                                      <p:to>
+                                        <p:strVal val="visible"/>
+                                      </p:to>
+                                    </p:set>
+                                  </p:childTnLst>
+                                </p:cTn>
+                              </p:par>
+                            </p:childTnLst>
+                          </p:cTn>
+                        </p:par>
+                      </p:childTnLst>
+                    </p:cTn>
+                  </p:par>
+                </p:childTnLst>
+              </p:cTn>
+              <p:prevCondLst>
+                <p:cond evt="onPrev" delay="0">
+                  <p:tgtEl>
+                    <p:sldTgt/>
+                  </p:tgtEl>
+                </p:cond>
+              </p:prevCondLst>
+              <p:nextCondLst>
+                <p:cond evt="onNext" delay="0">
+                  <p:tgtEl>
+                    <p:sldTgt/>
+                  </p:tgtEl>
+                </p:cond>
+              </p:nextCondLst>
+            </p:seq>
+          </p:childTnLst>
+        </p:cTn>
+      </p:par>
+    </p:tnLst>
+    <p:bldLst>
+      <p:bldP spid="2" grpId="0"/>
+      <p:bldP spid="3" grpId="0" build="p"/>
+    </p:bldLst>
+  </p:timing>
 </p:sld>
 </file>
 
@@ -4887,6 +8048,414 @@
   <p:clrMapOvr>
     <a:masterClrMapping/>
   </p:clrMapOvr>
+  <p:timing>
+    <p:tnLst>
+      <p:par>
+        <p:cTn id="1" dur="indefinite" restart="never" nodeType="tmRoot">
+          <p:childTnLst>
+            <p:seq concurrent="1" nextAc="seek">
+              <p:cTn id="2" dur="indefinite" nodeType="mainSeq">
+                <p:childTnLst>
+                  <p:par>
+                    <p:cTn id="3" fill="hold">
+                      <p:stCondLst>
+                        <p:cond delay="indefinite"/>
+                      </p:stCondLst>
+                      <p:childTnLst>
+                        <p:par>
+                          <p:cTn id="4" fill="hold">
+                            <p:stCondLst>
+                              <p:cond delay="0"/>
+                            </p:stCondLst>
+                            <p:childTnLst>
+                              <p:par>
+                                <p:cTn id="5" presetID="1" presetClass="entr" presetSubtype="0" fill="hold" grpId="0" nodeType="clickEffect">
+                                  <p:stCondLst>
+                                    <p:cond delay="0"/>
+                                  </p:stCondLst>
+                                  <p:childTnLst>
+                                    <p:set>
+                                      <p:cBhvr>
+                                        <p:cTn id="6" dur="1" fill="hold">
+                                          <p:stCondLst>
+                                            <p:cond delay="0"/>
+                                          </p:stCondLst>
+                                        </p:cTn>
+                                        <p:tgtEl>
+                                          <p:spTgt spid="2"/>
+                                        </p:tgtEl>
+                                        <p:attrNameLst>
+                                          <p:attrName>style.visibility</p:attrName>
+                                        </p:attrNameLst>
+                                      </p:cBhvr>
+                                      <p:to>
+                                        <p:strVal val="visible"/>
+                                      </p:to>
+                                    </p:set>
+                                  </p:childTnLst>
+                                </p:cTn>
+                              </p:par>
+                            </p:childTnLst>
+                          </p:cTn>
+                        </p:par>
+                      </p:childTnLst>
+                    </p:cTn>
+                  </p:par>
+                  <p:par>
+                    <p:cTn id="7" fill="hold">
+                      <p:stCondLst>
+                        <p:cond delay="indefinite"/>
+                      </p:stCondLst>
+                      <p:childTnLst>
+                        <p:par>
+                          <p:cTn id="8" fill="hold">
+                            <p:stCondLst>
+                              <p:cond delay="0"/>
+                            </p:stCondLst>
+                            <p:childTnLst>
+                              <p:par>
+                                <p:cTn id="9" presetID="1" presetClass="entr" presetSubtype="0" fill="hold" grpId="0" nodeType="clickEffect">
+                                  <p:stCondLst>
+                                    <p:cond delay="0"/>
+                                  </p:stCondLst>
+                                  <p:childTnLst>
+                                    <p:set>
+                                      <p:cBhvr>
+                                        <p:cTn id="10" dur="1" fill="hold">
+                                          <p:stCondLst>
+                                            <p:cond delay="0"/>
+                                          </p:stCondLst>
+                                        </p:cTn>
+                                        <p:tgtEl>
+                                          <p:spTgt spid="3">
+                                            <p:txEl>
+                                              <p:pRg st="0" end="0"/>
+                                            </p:txEl>
+                                          </p:spTgt>
+                                        </p:tgtEl>
+                                        <p:attrNameLst>
+                                          <p:attrName>style.visibility</p:attrName>
+                                        </p:attrNameLst>
+                                      </p:cBhvr>
+                                      <p:to>
+                                        <p:strVal val="visible"/>
+                                      </p:to>
+                                    </p:set>
+                                  </p:childTnLst>
+                                </p:cTn>
+                              </p:par>
+                            </p:childTnLst>
+                          </p:cTn>
+                        </p:par>
+                        <p:par>
+                          <p:cTn id="11" fill="hold">
+                            <p:stCondLst>
+                              <p:cond delay="0"/>
+                            </p:stCondLst>
+                            <p:childTnLst>
+                              <p:par>
+                                <p:cTn id="12" presetID="1" presetClass="entr" presetSubtype="0" fill="hold" grpId="0" nodeType="afterEffect">
+                                  <p:stCondLst>
+                                    <p:cond delay="0"/>
+                                  </p:stCondLst>
+                                  <p:childTnLst>
+                                    <p:set>
+                                      <p:cBhvr>
+                                        <p:cTn id="13" dur="1" fill="hold">
+                                          <p:stCondLst>
+                                            <p:cond delay="0"/>
+                                          </p:stCondLst>
+                                        </p:cTn>
+                                        <p:tgtEl>
+                                          <p:spTgt spid="3">
+                                            <p:txEl>
+                                              <p:pRg st="1" end="1"/>
+                                            </p:txEl>
+                                          </p:spTgt>
+                                        </p:tgtEl>
+                                        <p:attrNameLst>
+                                          <p:attrName>style.visibility</p:attrName>
+                                        </p:attrNameLst>
+                                      </p:cBhvr>
+                                      <p:to>
+                                        <p:strVal val="visible"/>
+                                      </p:to>
+                                    </p:set>
+                                  </p:childTnLst>
+                                </p:cTn>
+                              </p:par>
+                            </p:childTnLst>
+                          </p:cTn>
+                        </p:par>
+                        <p:par>
+                          <p:cTn id="14" fill="hold">
+                            <p:stCondLst>
+                              <p:cond delay="0"/>
+                            </p:stCondLst>
+                            <p:childTnLst>
+                              <p:par>
+                                <p:cTn id="15" presetID="1" presetClass="entr" presetSubtype="0" fill="hold" grpId="0" nodeType="afterEffect">
+                                  <p:stCondLst>
+                                    <p:cond delay="0"/>
+                                  </p:stCondLst>
+                                  <p:childTnLst>
+                                    <p:set>
+                                      <p:cBhvr>
+                                        <p:cTn id="16" dur="1" fill="hold">
+                                          <p:stCondLst>
+                                            <p:cond delay="0"/>
+                                          </p:stCondLst>
+                                        </p:cTn>
+                                        <p:tgtEl>
+                                          <p:spTgt spid="3">
+                                            <p:txEl>
+                                              <p:pRg st="2" end="2"/>
+                                            </p:txEl>
+                                          </p:spTgt>
+                                        </p:tgtEl>
+                                        <p:attrNameLst>
+                                          <p:attrName>style.visibility</p:attrName>
+                                        </p:attrNameLst>
+                                      </p:cBhvr>
+                                      <p:to>
+                                        <p:strVal val="visible"/>
+                                      </p:to>
+                                    </p:set>
+                                  </p:childTnLst>
+                                </p:cTn>
+                              </p:par>
+                            </p:childTnLst>
+                          </p:cTn>
+                        </p:par>
+                        <p:par>
+                          <p:cTn id="17" fill="hold">
+                            <p:stCondLst>
+                              <p:cond delay="0"/>
+                            </p:stCondLst>
+                            <p:childTnLst>
+                              <p:par>
+                                <p:cTn id="18" presetID="1" presetClass="entr" presetSubtype="0" fill="hold" grpId="0" nodeType="afterEffect">
+                                  <p:stCondLst>
+                                    <p:cond delay="0"/>
+                                  </p:stCondLst>
+                                  <p:childTnLst>
+                                    <p:set>
+                                      <p:cBhvr>
+                                        <p:cTn id="19" dur="1" fill="hold">
+                                          <p:stCondLst>
+                                            <p:cond delay="0"/>
+                                          </p:stCondLst>
+                                        </p:cTn>
+                                        <p:tgtEl>
+                                          <p:spTgt spid="3">
+                                            <p:txEl>
+                                              <p:pRg st="3" end="3"/>
+                                            </p:txEl>
+                                          </p:spTgt>
+                                        </p:tgtEl>
+                                        <p:attrNameLst>
+                                          <p:attrName>style.visibility</p:attrName>
+                                        </p:attrNameLst>
+                                      </p:cBhvr>
+                                      <p:to>
+                                        <p:strVal val="visible"/>
+                                      </p:to>
+                                    </p:set>
+                                  </p:childTnLst>
+                                </p:cTn>
+                              </p:par>
+                            </p:childTnLst>
+                          </p:cTn>
+                        </p:par>
+                        <p:par>
+                          <p:cTn id="20" fill="hold">
+                            <p:stCondLst>
+                              <p:cond delay="0"/>
+                            </p:stCondLst>
+                            <p:childTnLst>
+                              <p:par>
+                                <p:cTn id="21" presetID="1" presetClass="entr" presetSubtype="0" fill="hold" grpId="0" nodeType="afterEffect">
+                                  <p:stCondLst>
+                                    <p:cond delay="0"/>
+                                  </p:stCondLst>
+                                  <p:childTnLst>
+                                    <p:set>
+                                      <p:cBhvr>
+                                        <p:cTn id="22" dur="1" fill="hold">
+                                          <p:stCondLst>
+                                            <p:cond delay="0"/>
+                                          </p:stCondLst>
+                                        </p:cTn>
+                                        <p:tgtEl>
+                                          <p:spTgt spid="3">
+                                            <p:txEl>
+                                              <p:pRg st="4" end="4"/>
+                                            </p:txEl>
+                                          </p:spTgt>
+                                        </p:tgtEl>
+                                        <p:attrNameLst>
+                                          <p:attrName>style.visibility</p:attrName>
+                                        </p:attrNameLst>
+                                      </p:cBhvr>
+                                      <p:to>
+                                        <p:strVal val="visible"/>
+                                      </p:to>
+                                    </p:set>
+                                  </p:childTnLst>
+                                </p:cTn>
+                              </p:par>
+                            </p:childTnLst>
+                          </p:cTn>
+                        </p:par>
+                        <p:par>
+                          <p:cTn id="23" fill="hold">
+                            <p:stCondLst>
+                              <p:cond delay="0"/>
+                            </p:stCondLst>
+                            <p:childTnLst>
+                              <p:par>
+                                <p:cTn id="24" presetID="1" presetClass="entr" presetSubtype="0" fill="hold" grpId="0" nodeType="afterEffect">
+                                  <p:stCondLst>
+                                    <p:cond delay="0"/>
+                                  </p:stCondLst>
+                                  <p:childTnLst>
+                                    <p:set>
+                                      <p:cBhvr>
+                                        <p:cTn id="25" dur="1" fill="hold">
+                                          <p:stCondLst>
+                                            <p:cond delay="0"/>
+                                          </p:stCondLst>
+                                        </p:cTn>
+                                        <p:tgtEl>
+                                          <p:spTgt spid="3">
+                                            <p:txEl>
+                                              <p:pRg st="5" end="5"/>
+                                            </p:txEl>
+                                          </p:spTgt>
+                                        </p:tgtEl>
+                                        <p:attrNameLst>
+                                          <p:attrName>style.visibility</p:attrName>
+                                        </p:attrNameLst>
+                                      </p:cBhvr>
+                                      <p:to>
+                                        <p:strVal val="visible"/>
+                                      </p:to>
+                                    </p:set>
+                                  </p:childTnLst>
+                                </p:cTn>
+                              </p:par>
+                            </p:childTnLst>
+                          </p:cTn>
+                        </p:par>
+                        <p:par>
+                          <p:cTn id="26" fill="hold">
+                            <p:stCondLst>
+                              <p:cond delay="0"/>
+                            </p:stCondLst>
+                            <p:childTnLst>
+                              <p:par>
+                                <p:cTn id="27" presetID="1" presetClass="entr" presetSubtype="0" fill="hold" grpId="0" nodeType="afterEffect">
+                                  <p:stCondLst>
+                                    <p:cond delay="0"/>
+                                  </p:stCondLst>
+                                  <p:childTnLst>
+                                    <p:set>
+                                      <p:cBhvr>
+                                        <p:cTn id="28" dur="1" fill="hold">
+                                          <p:stCondLst>
+                                            <p:cond delay="0"/>
+                                          </p:stCondLst>
+                                        </p:cTn>
+                                        <p:tgtEl>
+                                          <p:spTgt spid="3">
+                                            <p:txEl>
+                                              <p:pRg st="6" end="6"/>
+                                            </p:txEl>
+                                          </p:spTgt>
+                                        </p:tgtEl>
+                                        <p:attrNameLst>
+                                          <p:attrName>style.visibility</p:attrName>
+                                        </p:attrNameLst>
+                                      </p:cBhvr>
+                                      <p:to>
+                                        <p:strVal val="visible"/>
+                                      </p:to>
+                                    </p:set>
+                                  </p:childTnLst>
+                                </p:cTn>
+                              </p:par>
+                            </p:childTnLst>
+                          </p:cTn>
+                        </p:par>
+                        <p:par>
+                          <p:cTn id="29" fill="hold">
+                            <p:stCondLst>
+                              <p:cond delay="0"/>
+                            </p:stCondLst>
+                            <p:childTnLst>
+                              <p:par>
+                                <p:cTn id="30" presetID="1" presetClass="entr" presetSubtype="0" fill="hold" grpId="0" nodeType="afterEffect">
+                                  <p:stCondLst>
+                                    <p:cond delay="0"/>
+                                  </p:stCondLst>
+                                  <p:childTnLst>
+                                    <p:set>
+                                      <p:cBhvr>
+                                        <p:cTn id="31" dur="1" fill="hold">
+                                          <p:stCondLst>
+                                            <p:cond delay="0"/>
+                                          </p:stCondLst>
+                                        </p:cTn>
+                                        <p:tgtEl>
+                                          <p:spTgt spid="3">
+                                            <p:txEl>
+                                              <p:pRg st="7" end="7"/>
+                                            </p:txEl>
+                                          </p:spTgt>
+                                        </p:tgtEl>
+                                        <p:attrNameLst>
+                                          <p:attrName>style.visibility</p:attrName>
+                                        </p:attrNameLst>
+                                      </p:cBhvr>
+                                      <p:to>
+                                        <p:strVal val="visible"/>
+                                      </p:to>
+                                    </p:set>
+                                  </p:childTnLst>
+                                </p:cTn>
+                              </p:par>
+                            </p:childTnLst>
+                          </p:cTn>
+                        </p:par>
+                      </p:childTnLst>
+                    </p:cTn>
+                  </p:par>
+                </p:childTnLst>
+              </p:cTn>
+              <p:prevCondLst>
+                <p:cond evt="onPrev" delay="0">
+                  <p:tgtEl>
+                    <p:sldTgt/>
+                  </p:tgtEl>
+                </p:cond>
+              </p:prevCondLst>
+              <p:nextCondLst>
+                <p:cond evt="onNext" delay="0">
+                  <p:tgtEl>
+                    <p:sldTgt/>
+                  </p:tgtEl>
+                </p:cond>
+              </p:nextCondLst>
+            </p:seq>
+          </p:childTnLst>
+        </p:cTn>
+      </p:par>
+    </p:tnLst>
+    <p:bldLst>
+      <p:bldP spid="2" grpId="0"/>
+      <p:bldP spid="3" grpId="0" uiExpand="1" build="p"/>
+    </p:bldLst>
+  </p:timing>
 </p:sld>
 </file>
 
@@ -5064,6 +8633,494 @@
   <p:clrMapOvr>
     <a:masterClrMapping/>
   </p:clrMapOvr>
+  <p:timing>
+    <p:tnLst>
+      <p:par>
+        <p:cTn id="1" dur="indefinite" restart="never" nodeType="tmRoot">
+          <p:childTnLst>
+            <p:seq concurrent="1" nextAc="seek">
+              <p:cTn id="2" dur="indefinite" nodeType="mainSeq">
+                <p:childTnLst>
+                  <p:par>
+                    <p:cTn id="3" fill="hold">
+                      <p:stCondLst>
+                        <p:cond delay="indefinite"/>
+                      </p:stCondLst>
+                      <p:childTnLst>
+                        <p:par>
+                          <p:cTn id="4" fill="hold">
+                            <p:stCondLst>
+                              <p:cond delay="0"/>
+                            </p:stCondLst>
+                            <p:childTnLst>
+                              <p:par>
+                                <p:cTn id="5" presetID="1" presetClass="entr" presetSubtype="0" fill="hold" grpId="0" nodeType="clickEffect">
+                                  <p:stCondLst>
+                                    <p:cond delay="0"/>
+                                  </p:stCondLst>
+                                  <p:childTnLst>
+                                    <p:set>
+                                      <p:cBhvr>
+                                        <p:cTn id="6" dur="1" fill="hold">
+                                          <p:stCondLst>
+                                            <p:cond delay="0"/>
+                                          </p:stCondLst>
+                                        </p:cTn>
+                                        <p:tgtEl>
+                                          <p:spTgt spid="2"/>
+                                        </p:tgtEl>
+                                        <p:attrNameLst>
+                                          <p:attrName>style.visibility</p:attrName>
+                                        </p:attrNameLst>
+                                      </p:cBhvr>
+                                      <p:to>
+                                        <p:strVal val="visible"/>
+                                      </p:to>
+                                    </p:set>
+                                  </p:childTnLst>
+                                </p:cTn>
+                              </p:par>
+                            </p:childTnLst>
+                          </p:cTn>
+                        </p:par>
+                      </p:childTnLst>
+                    </p:cTn>
+                  </p:par>
+                  <p:par>
+                    <p:cTn id="7" fill="hold">
+                      <p:stCondLst>
+                        <p:cond delay="indefinite"/>
+                      </p:stCondLst>
+                      <p:childTnLst>
+                        <p:par>
+                          <p:cTn id="8" fill="hold">
+                            <p:stCondLst>
+                              <p:cond delay="0"/>
+                            </p:stCondLst>
+                            <p:childTnLst>
+                              <p:par>
+                                <p:cTn id="9" presetID="1" presetClass="entr" presetSubtype="0" fill="hold" grpId="0" nodeType="clickEffect">
+                                  <p:stCondLst>
+                                    <p:cond delay="0"/>
+                                  </p:stCondLst>
+                                  <p:childTnLst>
+                                    <p:set>
+                                      <p:cBhvr>
+                                        <p:cTn id="10" dur="1" fill="hold">
+                                          <p:stCondLst>
+                                            <p:cond delay="0"/>
+                                          </p:stCondLst>
+                                        </p:cTn>
+                                        <p:tgtEl>
+                                          <p:spTgt spid="3">
+                                            <p:txEl>
+                                              <p:pRg st="0" end="0"/>
+                                            </p:txEl>
+                                          </p:spTgt>
+                                        </p:tgtEl>
+                                        <p:attrNameLst>
+                                          <p:attrName>style.visibility</p:attrName>
+                                        </p:attrNameLst>
+                                      </p:cBhvr>
+                                      <p:to>
+                                        <p:strVal val="visible"/>
+                                      </p:to>
+                                    </p:set>
+                                  </p:childTnLst>
+                                </p:cTn>
+                              </p:par>
+                            </p:childTnLst>
+                          </p:cTn>
+                        </p:par>
+                        <p:par>
+                          <p:cTn id="11" fill="hold">
+                            <p:stCondLst>
+                              <p:cond delay="0"/>
+                            </p:stCondLst>
+                            <p:childTnLst>
+                              <p:par>
+                                <p:cTn id="12" presetID="1" presetClass="entr" presetSubtype="0" fill="hold" grpId="0" nodeType="afterEffect">
+                                  <p:stCondLst>
+                                    <p:cond delay="0"/>
+                                  </p:stCondLst>
+                                  <p:childTnLst>
+                                    <p:set>
+                                      <p:cBhvr>
+                                        <p:cTn id="13" dur="1" fill="hold">
+                                          <p:stCondLst>
+                                            <p:cond delay="0"/>
+                                          </p:stCondLst>
+                                        </p:cTn>
+                                        <p:tgtEl>
+                                          <p:spTgt spid="3">
+                                            <p:txEl>
+                                              <p:pRg st="1" end="1"/>
+                                            </p:txEl>
+                                          </p:spTgt>
+                                        </p:tgtEl>
+                                        <p:attrNameLst>
+                                          <p:attrName>style.visibility</p:attrName>
+                                        </p:attrNameLst>
+                                      </p:cBhvr>
+                                      <p:to>
+                                        <p:strVal val="visible"/>
+                                      </p:to>
+                                    </p:set>
+                                  </p:childTnLst>
+                                </p:cTn>
+                              </p:par>
+                            </p:childTnLst>
+                          </p:cTn>
+                        </p:par>
+                        <p:par>
+                          <p:cTn id="14" fill="hold">
+                            <p:stCondLst>
+                              <p:cond delay="0"/>
+                            </p:stCondLst>
+                            <p:childTnLst>
+                              <p:par>
+                                <p:cTn id="15" presetID="1" presetClass="entr" presetSubtype="0" fill="hold" grpId="0" nodeType="afterEffect">
+                                  <p:stCondLst>
+                                    <p:cond delay="0"/>
+                                  </p:stCondLst>
+                                  <p:childTnLst>
+                                    <p:set>
+                                      <p:cBhvr>
+                                        <p:cTn id="16" dur="1" fill="hold">
+                                          <p:stCondLst>
+                                            <p:cond delay="0"/>
+                                          </p:stCondLst>
+                                        </p:cTn>
+                                        <p:tgtEl>
+                                          <p:spTgt spid="3">
+                                            <p:txEl>
+                                              <p:pRg st="2" end="2"/>
+                                            </p:txEl>
+                                          </p:spTgt>
+                                        </p:tgtEl>
+                                        <p:attrNameLst>
+                                          <p:attrName>style.visibility</p:attrName>
+                                        </p:attrNameLst>
+                                      </p:cBhvr>
+                                      <p:to>
+                                        <p:strVal val="visible"/>
+                                      </p:to>
+                                    </p:set>
+                                  </p:childTnLst>
+                                </p:cTn>
+                              </p:par>
+                            </p:childTnLst>
+                          </p:cTn>
+                        </p:par>
+                        <p:par>
+                          <p:cTn id="17" fill="hold">
+                            <p:stCondLst>
+                              <p:cond delay="0"/>
+                            </p:stCondLst>
+                            <p:childTnLst>
+                              <p:par>
+                                <p:cTn id="18" presetID="1" presetClass="entr" presetSubtype="0" fill="hold" grpId="0" nodeType="afterEffect">
+                                  <p:stCondLst>
+                                    <p:cond delay="0"/>
+                                  </p:stCondLst>
+                                  <p:childTnLst>
+                                    <p:set>
+                                      <p:cBhvr>
+                                        <p:cTn id="19" dur="1" fill="hold">
+                                          <p:stCondLst>
+                                            <p:cond delay="0"/>
+                                          </p:stCondLst>
+                                        </p:cTn>
+                                        <p:tgtEl>
+                                          <p:spTgt spid="3">
+                                            <p:txEl>
+                                              <p:pRg st="3" end="3"/>
+                                            </p:txEl>
+                                          </p:spTgt>
+                                        </p:tgtEl>
+                                        <p:attrNameLst>
+                                          <p:attrName>style.visibility</p:attrName>
+                                        </p:attrNameLst>
+                                      </p:cBhvr>
+                                      <p:to>
+                                        <p:strVal val="visible"/>
+                                      </p:to>
+                                    </p:set>
+                                  </p:childTnLst>
+                                </p:cTn>
+                              </p:par>
+                            </p:childTnLst>
+                          </p:cTn>
+                        </p:par>
+                        <p:par>
+                          <p:cTn id="20" fill="hold">
+                            <p:stCondLst>
+                              <p:cond delay="0"/>
+                            </p:stCondLst>
+                            <p:childTnLst>
+                              <p:par>
+                                <p:cTn id="21" presetID="1" presetClass="entr" presetSubtype="0" fill="hold" grpId="0" nodeType="afterEffect">
+                                  <p:stCondLst>
+                                    <p:cond delay="0"/>
+                                  </p:stCondLst>
+                                  <p:childTnLst>
+                                    <p:set>
+                                      <p:cBhvr>
+                                        <p:cTn id="22" dur="1" fill="hold">
+                                          <p:stCondLst>
+                                            <p:cond delay="0"/>
+                                          </p:stCondLst>
+                                        </p:cTn>
+                                        <p:tgtEl>
+                                          <p:spTgt spid="3">
+                                            <p:txEl>
+                                              <p:pRg st="4" end="4"/>
+                                            </p:txEl>
+                                          </p:spTgt>
+                                        </p:tgtEl>
+                                        <p:attrNameLst>
+                                          <p:attrName>style.visibility</p:attrName>
+                                        </p:attrNameLst>
+                                      </p:cBhvr>
+                                      <p:to>
+                                        <p:strVal val="visible"/>
+                                      </p:to>
+                                    </p:set>
+                                  </p:childTnLst>
+                                </p:cTn>
+                              </p:par>
+                            </p:childTnLst>
+                          </p:cTn>
+                        </p:par>
+                        <p:par>
+                          <p:cTn id="23" fill="hold">
+                            <p:stCondLst>
+                              <p:cond delay="0"/>
+                            </p:stCondLst>
+                            <p:childTnLst>
+                              <p:par>
+                                <p:cTn id="24" presetID="1" presetClass="entr" presetSubtype="0" fill="hold" grpId="0" nodeType="afterEffect">
+                                  <p:stCondLst>
+                                    <p:cond delay="0"/>
+                                  </p:stCondLst>
+                                  <p:childTnLst>
+                                    <p:set>
+                                      <p:cBhvr>
+                                        <p:cTn id="25" dur="1" fill="hold">
+                                          <p:stCondLst>
+                                            <p:cond delay="0"/>
+                                          </p:stCondLst>
+                                        </p:cTn>
+                                        <p:tgtEl>
+                                          <p:spTgt spid="3">
+                                            <p:txEl>
+                                              <p:pRg st="5" end="5"/>
+                                            </p:txEl>
+                                          </p:spTgt>
+                                        </p:tgtEl>
+                                        <p:attrNameLst>
+                                          <p:attrName>style.visibility</p:attrName>
+                                        </p:attrNameLst>
+                                      </p:cBhvr>
+                                      <p:to>
+                                        <p:strVal val="visible"/>
+                                      </p:to>
+                                    </p:set>
+                                  </p:childTnLst>
+                                </p:cTn>
+                              </p:par>
+                            </p:childTnLst>
+                          </p:cTn>
+                        </p:par>
+                        <p:par>
+                          <p:cTn id="26" fill="hold">
+                            <p:stCondLst>
+                              <p:cond delay="0"/>
+                            </p:stCondLst>
+                            <p:childTnLst>
+                              <p:par>
+                                <p:cTn id="27" presetID="1" presetClass="entr" presetSubtype="0" fill="hold" grpId="0" nodeType="afterEffect">
+                                  <p:stCondLst>
+                                    <p:cond delay="0"/>
+                                  </p:stCondLst>
+                                  <p:childTnLst>
+                                    <p:set>
+                                      <p:cBhvr>
+                                        <p:cTn id="28" dur="1" fill="hold">
+                                          <p:stCondLst>
+                                            <p:cond delay="0"/>
+                                          </p:stCondLst>
+                                        </p:cTn>
+                                        <p:tgtEl>
+                                          <p:spTgt spid="3">
+                                            <p:txEl>
+                                              <p:pRg st="6" end="6"/>
+                                            </p:txEl>
+                                          </p:spTgt>
+                                        </p:tgtEl>
+                                        <p:attrNameLst>
+                                          <p:attrName>style.visibility</p:attrName>
+                                        </p:attrNameLst>
+                                      </p:cBhvr>
+                                      <p:to>
+                                        <p:strVal val="visible"/>
+                                      </p:to>
+                                    </p:set>
+                                  </p:childTnLst>
+                                </p:cTn>
+                              </p:par>
+                            </p:childTnLst>
+                          </p:cTn>
+                        </p:par>
+                        <p:par>
+                          <p:cTn id="29" fill="hold">
+                            <p:stCondLst>
+                              <p:cond delay="0"/>
+                            </p:stCondLst>
+                            <p:childTnLst>
+                              <p:par>
+                                <p:cTn id="30" presetID="1" presetClass="entr" presetSubtype="0" fill="hold" grpId="0" nodeType="afterEffect">
+                                  <p:stCondLst>
+                                    <p:cond delay="0"/>
+                                  </p:stCondLst>
+                                  <p:childTnLst>
+                                    <p:set>
+                                      <p:cBhvr>
+                                        <p:cTn id="31" dur="1" fill="hold">
+                                          <p:stCondLst>
+                                            <p:cond delay="0"/>
+                                          </p:stCondLst>
+                                        </p:cTn>
+                                        <p:tgtEl>
+                                          <p:spTgt spid="3">
+                                            <p:txEl>
+                                              <p:pRg st="7" end="7"/>
+                                            </p:txEl>
+                                          </p:spTgt>
+                                        </p:tgtEl>
+                                        <p:attrNameLst>
+                                          <p:attrName>style.visibility</p:attrName>
+                                        </p:attrNameLst>
+                                      </p:cBhvr>
+                                      <p:to>
+                                        <p:strVal val="visible"/>
+                                      </p:to>
+                                    </p:set>
+                                  </p:childTnLst>
+                                </p:cTn>
+                              </p:par>
+                            </p:childTnLst>
+                          </p:cTn>
+                        </p:par>
+                        <p:par>
+                          <p:cTn id="32" fill="hold">
+                            <p:stCondLst>
+                              <p:cond delay="0"/>
+                            </p:stCondLst>
+                            <p:childTnLst>
+                              <p:par>
+                                <p:cTn id="33" presetID="1" presetClass="entr" presetSubtype="0" fill="hold" grpId="0" nodeType="afterEffect">
+                                  <p:stCondLst>
+                                    <p:cond delay="0"/>
+                                  </p:stCondLst>
+                                  <p:childTnLst>
+                                    <p:set>
+                                      <p:cBhvr>
+                                        <p:cTn id="34" dur="1" fill="hold">
+                                          <p:stCondLst>
+                                            <p:cond delay="0"/>
+                                          </p:stCondLst>
+                                        </p:cTn>
+                                        <p:tgtEl>
+                                          <p:spTgt spid="3">
+                                            <p:txEl>
+                                              <p:pRg st="8" end="8"/>
+                                            </p:txEl>
+                                          </p:spTgt>
+                                        </p:tgtEl>
+                                        <p:attrNameLst>
+                                          <p:attrName>style.visibility</p:attrName>
+                                        </p:attrNameLst>
+                                      </p:cBhvr>
+                                      <p:to>
+                                        <p:strVal val="visible"/>
+                                      </p:to>
+                                    </p:set>
+                                  </p:childTnLst>
+                                </p:cTn>
+                              </p:par>
+                            </p:childTnLst>
+                          </p:cTn>
+                        </p:par>
+                        <p:par>
+                          <p:cTn id="35" fill="hold">
+                            <p:stCondLst>
+                              <p:cond delay="0"/>
+                            </p:stCondLst>
+                            <p:childTnLst>
+                              <p:par>
+                                <p:cTn id="36" presetID="1" presetClass="entr" presetSubtype="0" fill="hold" grpId="0" nodeType="afterEffect">
+                                  <p:stCondLst>
+                                    <p:cond delay="0"/>
+                                  </p:stCondLst>
+                                  <p:childTnLst>
+                                    <p:set>
+                                      <p:cBhvr>
+                                        <p:cTn id="37" dur="1" fill="hold">
+                                          <p:stCondLst>
+                                            <p:cond delay="0"/>
+                                          </p:stCondLst>
+                                        </p:cTn>
+                                        <p:tgtEl>
+                                          <p:spTgt spid="3">
+                                            <p:txEl>
+                                              <p:pRg st="9" end="9"/>
+                                            </p:txEl>
+                                          </p:spTgt>
+                                        </p:tgtEl>
+                                        <p:attrNameLst>
+                                          <p:attrName>style.visibility</p:attrName>
+                                        </p:attrNameLst>
+                                      </p:cBhvr>
+                                      <p:to>
+                                        <p:strVal val="visible"/>
+                                      </p:to>
+                                    </p:set>
+                                  </p:childTnLst>
+                                </p:cTn>
+                              </p:par>
+                            </p:childTnLst>
+                          </p:cTn>
+                        </p:par>
+                      </p:childTnLst>
+                    </p:cTn>
+                  </p:par>
+                </p:childTnLst>
+              </p:cTn>
+              <p:prevCondLst>
+                <p:cond evt="onPrev" delay="0">
+                  <p:tgtEl>
+                    <p:sldTgt/>
+                  </p:tgtEl>
+                </p:cond>
+              </p:prevCondLst>
+              <p:nextCondLst>
+                <p:cond evt="onNext" delay="0">
+                  <p:tgtEl>
+                    <p:sldTgt/>
+                  </p:tgtEl>
+                </p:cond>
+              </p:nextCondLst>
+            </p:seq>
+          </p:childTnLst>
+        </p:cTn>
+      </p:par>
+    </p:tnLst>
+    <p:bldLst>
+      <p:bldP spid="2" grpId="0"/>
+      <p:bldP spid="3" grpId="0" uiExpand="1" build="p"/>
+    </p:bldLst>
+  </p:timing>
 </p:sld>
 </file>
 
@@ -5228,6 +9285,414 @@
   <p:clrMapOvr>
     <a:masterClrMapping/>
   </p:clrMapOvr>
+  <p:timing>
+    <p:tnLst>
+      <p:par>
+        <p:cTn id="1" dur="indefinite" restart="never" nodeType="tmRoot">
+          <p:childTnLst>
+            <p:seq concurrent="1" nextAc="seek">
+              <p:cTn id="2" dur="indefinite" nodeType="mainSeq">
+                <p:childTnLst>
+                  <p:par>
+                    <p:cTn id="3" fill="hold">
+                      <p:stCondLst>
+                        <p:cond delay="indefinite"/>
+                      </p:stCondLst>
+                      <p:childTnLst>
+                        <p:par>
+                          <p:cTn id="4" fill="hold">
+                            <p:stCondLst>
+                              <p:cond delay="0"/>
+                            </p:stCondLst>
+                            <p:childTnLst>
+                              <p:par>
+                                <p:cTn id="5" presetID="1" presetClass="entr" presetSubtype="0" fill="hold" grpId="0" nodeType="clickEffect">
+                                  <p:stCondLst>
+                                    <p:cond delay="0"/>
+                                  </p:stCondLst>
+                                  <p:childTnLst>
+                                    <p:set>
+                                      <p:cBhvr>
+                                        <p:cTn id="6" dur="1" fill="hold">
+                                          <p:stCondLst>
+                                            <p:cond delay="0"/>
+                                          </p:stCondLst>
+                                        </p:cTn>
+                                        <p:tgtEl>
+                                          <p:spTgt spid="2"/>
+                                        </p:tgtEl>
+                                        <p:attrNameLst>
+                                          <p:attrName>style.visibility</p:attrName>
+                                        </p:attrNameLst>
+                                      </p:cBhvr>
+                                      <p:to>
+                                        <p:strVal val="visible"/>
+                                      </p:to>
+                                    </p:set>
+                                  </p:childTnLst>
+                                </p:cTn>
+                              </p:par>
+                            </p:childTnLst>
+                          </p:cTn>
+                        </p:par>
+                      </p:childTnLst>
+                    </p:cTn>
+                  </p:par>
+                  <p:par>
+                    <p:cTn id="7" fill="hold">
+                      <p:stCondLst>
+                        <p:cond delay="indefinite"/>
+                      </p:stCondLst>
+                      <p:childTnLst>
+                        <p:par>
+                          <p:cTn id="8" fill="hold">
+                            <p:stCondLst>
+                              <p:cond delay="0"/>
+                            </p:stCondLst>
+                            <p:childTnLst>
+                              <p:par>
+                                <p:cTn id="9" presetID="1" presetClass="entr" presetSubtype="0" fill="hold" grpId="0" nodeType="clickEffect">
+                                  <p:stCondLst>
+                                    <p:cond delay="0"/>
+                                  </p:stCondLst>
+                                  <p:childTnLst>
+                                    <p:set>
+                                      <p:cBhvr>
+                                        <p:cTn id="10" dur="1" fill="hold">
+                                          <p:stCondLst>
+                                            <p:cond delay="0"/>
+                                          </p:stCondLst>
+                                        </p:cTn>
+                                        <p:tgtEl>
+                                          <p:spTgt spid="3">
+                                            <p:txEl>
+                                              <p:pRg st="0" end="0"/>
+                                            </p:txEl>
+                                          </p:spTgt>
+                                        </p:tgtEl>
+                                        <p:attrNameLst>
+                                          <p:attrName>style.visibility</p:attrName>
+                                        </p:attrNameLst>
+                                      </p:cBhvr>
+                                      <p:to>
+                                        <p:strVal val="visible"/>
+                                      </p:to>
+                                    </p:set>
+                                  </p:childTnLst>
+                                </p:cTn>
+                              </p:par>
+                            </p:childTnLst>
+                          </p:cTn>
+                        </p:par>
+                        <p:par>
+                          <p:cTn id="11" fill="hold">
+                            <p:stCondLst>
+                              <p:cond delay="0"/>
+                            </p:stCondLst>
+                            <p:childTnLst>
+                              <p:par>
+                                <p:cTn id="12" presetID="1" presetClass="entr" presetSubtype="0" fill="hold" grpId="0" nodeType="afterEffect">
+                                  <p:stCondLst>
+                                    <p:cond delay="0"/>
+                                  </p:stCondLst>
+                                  <p:childTnLst>
+                                    <p:set>
+                                      <p:cBhvr>
+                                        <p:cTn id="13" dur="1" fill="hold">
+                                          <p:stCondLst>
+                                            <p:cond delay="0"/>
+                                          </p:stCondLst>
+                                        </p:cTn>
+                                        <p:tgtEl>
+                                          <p:spTgt spid="3">
+                                            <p:txEl>
+                                              <p:pRg st="1" end="1"/>
+                                            </p:txEl>
+                                          </p:spTgt>
+                                        </p:tgtEl>
+                                        <p:attrNameLst>
+                                          <p:attrName>style.visibility</p:attrName>
+                                        </p:attrNameLst>
+                                      </p:cBhvr>
+                                      <p:to>
+                                        <p:strVal val="visible"/>
+                                      </p:to>
+                                    </p:set>
+                                  </p:childTnLst>
+                                </p:cTn>
+                              </p:par>
+                            </p:childTnLst>
+                          </p:cTn>
+                        </p:par>
+                        <p:par>
+                          <p:cTn id="14" fill="hold">
+                            <p:stCondLst>
+                              <p:cond delay="0"/>
+                            </p:stCondLst>
+                            <p:childTnLst>
+                              <p:par>
+                                <p:cTn id="15" presetID="1" presetClass="entr" presetSubtype="0" fill="hold" grpId="0" nodeType="afterEffect">
+                                  <p:stCondLst>
+                                    <p:cond delay="0"/>
+                                  </p:stCondLst>
+                                  <p:childTnLst>
+                                    <p:set>
+                                      <p:cBhvr>
+                                        <p:cTn id="16" dur="1" fill="hold">
+                                          <p:stCondLst>
+                                            <p:cond delay="0"/>
+                                          </p:stCondLst>
+                                        </p:cTn>
+                                        <p:tgtEl>
+                                          <p:spTgt spid="3">
+                                            <p:txEl>
+                                              <p:pRg st="2" end="2"/>
+                                            </p:txEl>
+                                          </p:spTgt>
+                                        </p:tgtEl>
+                                        <p:attrNameLst>
+                                          <p:attrName>style.visibility</p:attrName>
+                                        </p:attrNameLst>
+                                      </p:cBhvr>
+                                      <p:to>
+                                        <p:strVal val="visible"/>
+                                      </p:to>
+                                    </p:set>
+                                  </p:childTnLst>
+                                </p:cTn>
+                              </p:par>
+                            </p:childTnLst>
+                          </p:cTn>
+                        </p:par>
+                        <p:par>
+                          <p:cTn id="17" fill="hold">
+                            <p:stCondLst>
+                              <p:cond delay="0"/>
+                            </p:stCondLst>
+                            <p:childTnLst>
+                              <p:par>
+                                <p:cTn id="18" presetID="1" presetClass="entr" presetSubtype="0" fill="hold" grpId="0" nodeType="afterEffect">
+                                  <p:stCondLst>
+                                    <p:cond delay="0"/>
+                                  </p:stCondLst>
+                                  <p:childTnLst>
+                                    <p:set>
+                                      <p:cBhvr>
+                                        <p:cTn id="19" dur="1" fill="hold">
+                                          <p:stCondLst>
+                                            <p:cond delay="0"/>
+                                          </p:stCondLst>
+                                        </p:cTn>
+                                        <p:tgtEl>
+                                          <p:spTgt spid="3">
+                                            <p:txEl>
+                                              <p:pRg st="3" end="3"/>
+                                            </p:txEl>
+                                          </p:spTgt>
+                                        </p:tgtEl>
+                                        <p:attrNameLst>
+                                          <p:attrName>style.visibility</p:attrName>
+                                        </p:attrNameLst>
+                                      </p:cBhvr>
+                                      <p:to>
+                                        <p:strVal val="visible"/>
+                                      </p:to>
+                                    </p:set>
+                                  </p:childTnLst>
+                                </p:cTn>
+                              </p:par>
+                            </p:childTnLst>
+                          </p:cTn>
+                        </p:par>
+                        <p:par>
+                          <p:cTn id="20" fill="hold">
+                            <p:stCondLst>
+                              <p:cond delay="0"/>
+                            </p:stCondLst>
+                            <p:childTnLst>
+                              <p:par>
+                                <p:cTn id="21" presetID="1" presetClass="entr" presetSubtype="0" fill="hold" grpId="0" nodeType="afterEffect">
+                                  <p:stCondLst>
+                                    <p:cond delay="0"/>
+                                  </p:stCondLst>
+                                  <p:childTnLst>
+                                    <p:set>
+                                      <p:cBhvr>
+                                        <p:cTn id="22" dur="1" fill="hold">
+                                          <p:stCondLst>
+                                            <p:cond delay="0"/>
+                                          </p:stCondLst>
+                                        </p:cTn>
+                                        <p:tgtEl>
+                                          <p:spTgt spid="3">
+                                            <p:txEl>
+                                              <p:pRg st="4" end="4"/>
+                                            </p:txEl>
+                                          </p:spTgt>
+                                        </p:tgtEl>
+                                        <p:attrNameLst>
+                                          <p:attrName>style.visibility</p:attrName>
+                                        </p:attrNameLst>
+                                      </p:cBhvr>
+                                      <p:to>
+                                        <p:strVal val="visible"/>
+                                      </p:to>
+                                    </p:set>
+                                  </p:childTnLst>
+                                </p:cTn>
+                              </p:par>
+                            </p:childTnLst>
+                          </p:cTn>
+                        </p:par>
+                        <p:par>
+                          <p:cTn id="23" fill="hold">
+                            <p:stCondLst>
+                              <p:cond delay="0"/>
+                            </p:stCondLst>
+                            <p:childTnLst>
+                              <p:par>
+                                <p:cTn id="24" presetID="1" presetClass="entr" presetSubtype="0" fill="hold" grpId="0" nodeType="afterEffect">
+                                  <p:stCondLst>
+                                    <p:cond delay="0"/>
+                                  </p:stCondLst>
+                                  <p:childTnLst>
+                                    <p:set>
+                                      <p:cBhvr>
+                                        <p:cTn id="25" dur="1" fill="hold">
+                                          <p:stCondLst>
+                                            <p:cond delay="0"/>
+                                          </p:stCondLst>
+                                        </p:cTn>
+                                        <p:tgtEl>
+                                          <p:spTgt spid="3">
+                                            <p:txEl>
+                                              <p:pRg st="5" end="5"/>
+                                            </p:txEl>
+                                          </p:spTgt>
+                                        </p:tgtEl>
+                                        <p:attrNameLst>
+                                          <p:attrName>style.visibility</p:attrName>
+                                        </p:attrNameLst>
+                                      </p:cBhvr>
+                                      <p:to>
+                                        <p:strVal val="visible"/>
+                                      </p:to>
+                                    </p:set>
+                                  </p:childTnLst>
+                                </p:cTn>
+                              </p:par>
+                            </p:childTnLst>
+                          </p:cTn>
+                        </p:par>
+                        <p:par>
+                          <p:cTn id="26" fill="hold">
+                            <p:stCondLst>
+                              <p:cond delay="0"/>
+                            </p:stCondLst>
+                            <p:childTnLst>
+                              <p:par>
+                                <p:cTn id="27" presetID="1" presetClass="entr" presetSubtype="0" fill="hold" grpId="0" nodeType="afterEffect">
+                                  <p:stCondLst>
+                                    <p:cond delay="0"/>
+                                  </p:stCondLst>
+                                  <p:childTnLst>
+                                    <p:set>
+                                      <p:cBhvr>
+                                        <p:cTn id="28" dur="1" fill="hold">
+                                          <p:stCondLst>
+                                            <p:cond delay="0"/>
+                                          </p:stCondLst>
+                                        </p:cTn>
+                                        <p:tgtEl>
+                                          <p:spTgt spid="3">
+                                            <p:txEl>
+                                              <p:pRg st="6" end="6"/>
+                                            </p:txEl>
+                                          </p:spTgt>
+                                        </p:tgtEl>
+                                        <p:attrNameLst>
+                                          <p:attrName>style.visibility</p:attrName>
+                                        </p:attrNameLst>
+                                      </p:cBhvr>
+                                      <p:to>
+                                        <p:strVal val="visible"/>
+                                      </p:to>
+                                    </p:set>
+                                  </p:childTnLst>
+                                </p:cTn>
+                              </p:par>
+                            </p:childTnLst>
+                          </p:cTn>
+                        </p:par>
+                        <p:par>
+                          <p:cTn id="29" fill="hold">
+                            <p:stCondLst>
+                              <p:cond delay="0"/>
+                            </p:stCondLst>
+                            <p:childTnLst>
+                              <p:par>
+                                <p:cTn id="30" presetID="1" presetClass="entr" presetSubtype="0" fill="hold" grpId="0" nodeType="afterEffect">
+                                  <p:stCondLst>
+                                    <p:cond delay="0"/>
+                                  </p:stCondLst>
+                                  <p:childTnLst>
+                                    <p:set>
+                                      <p:cBhvr>
+                                        <p:cTn id="31" dur="1" fill="hold">
+                                          <p:stCondLst>
+                                            <p:cond delay="0"/>
+                                          </p:stCondLst>
+                                        </p:cTn>
+                                        <p:tgtEl>
+                                          <p:spTgt spid="3">
+                                            <p:txEl>
+                                              <p:pRg st="7" end="7"/>
+                                            </p:txEl>
+                                          </p:spTgt>
+                                        </p:tgtEl>
+                                        <p:attrNameLst>
+                                          <p:attrName>style.visibility</p:attrName>
+                                        </p:attrNameLst>
+                                      </p:cBhvr>
+                                      <p:to>
+                                        <p:strVal val="visible"/>
+                                      </p:to>
+                                    </p:set>
+                                  </p:childTnLst>
+                                </p:cTn>
+                              </p:par>
+                            </p:childTnLst>
+                          </p:cTn>
+                        </p:par>
+                      </p:childTnLst>
+                    </p:cTn>
+                  </p:par>
+                </p:childTnLst>
+              </p:cTn>
+              <p:prevCondLst>
+                <p:cond evt="onPrev" delay="0">
+                  <p:tgtEl>
+                    <p:sldTgt/>
+                  </p:tgtEl>
+                </p:cond>
+              </p:prevCondLst>
+              <p:nextCondLst>
+                <p:cond evt="onNext" delay="0">
+                  <p:tgtEl>
+                    <p:sldTgt/>
+                  </p:tgtEl>
+                </p:cond>
+              </p:nextCondLst>
+            </p:seq>
+          </p:childTnLst>
+        </p:cTn>
+      </p:par>
+    </p:tnLst>
+    <p:bldLst>
+      <p:bldP spid="2" grpId="0"/>
+      <p:bldP spid="3" grpId="0" uiExpand="1" build="p"/>
+    </p:bldLst>
+  </p:timing>
 </p:sld>
 </file>
 
@@ -5501,6 +9966,330 @@
   <p:clrMapOvr>
     <a:masterClrMapping/>
   </p:clrMapOvr>
+  <p:timing>
+    <p:tnLst>
+      <p:par>
+        <p:cTn id="1" dur="indefinite" restart="never" nodeType="tmRoot">
+          <p:childTnLst>
+            <p:seq concurrent="1" nextAc="seek">
+              <p:cTn id="2" dur="indefinite" nodeType="mainSeq">
+                <p:childTnLst>
+                  <p:par>
+                    <p:cTn id="3" fill="hold">
+                      <p:stCondLst>
+                        <p:cond delay="indefinite"/>
+                      </p:stCondLst>
+                      <p:childTnLst>
+                        <p:par>
+                          <p:cTn id="4" fill="hold">
+                            <p:stCondLst>
+                              <p:cond delay="0"/>
+                            </p:stCondLst>
+                            <p:childTnLst>
+                              <p:par>
+                                <p:cTn id="5" presetID="1" presetClass="entr" presetSubtype="0" fill="hold" grpId="0" nodeType="clickEffect">
+                                  <p:stCondLst>
+                                    <p:cond delay="0"/>
+                                  </p:stCondLst>
+                                  <p:childTnLst>
+                                    <p:set>
+                                      <p:cBhvr>
+                                        <p:cTn id="6" dur="1" fill="hold">
+                                          <p:stCondLst>
+                                            <p:cond delay="0"/>
+                                          </p:stCondLst>
+                                        </p:cTn>
+                                        <p:tgtEl>
+                                          <p:spTgt spid="2"/>
+                                        </p:tgtEl>
+                                        <p:attrNameLst>
+                                          <p:attrName>style.visibility</p:attrName>
+                                        </p:attrNameLst>
+                                      </p:cBhvr>
+                                      <p:to>
+                                        <p:strVal val="visible"/>
+                                      </p:to>
+                                    </p:set>
+                                  </p:childTnLst>
+                                </p:cTn>
+                              </p:par>
+                            </p:childTnLst>
+                          </p:cTn>
+                        </p:par>
+                      </p:childTnLst>
+                    </p:cTn>
+                  </p:par>
+                  <p:par>
+                    <p:cTn id="7" fill="hold">
+                      <p:stCondLst>
+                        <p:cond delay="indefinite"/>
+                      </p:stCondLst>
+                      <p:childTnLst>
+                        <p:par>
+                          <p:cTn id="8" fill="hold">
+                            <p:stCondLst>
+                              <p:cond delay="0"/>
+                            </p:stCondLst>
+                            <p:childTnLst>
+                              <p:par>
+                                <p:cTn id="9" presetID="1" presetClass="entr" presetSubtype="0" fill="hold" nodeType="clickEffect">
+                                  <p:stCondLst>
+                                    <p:cond delay="0"/>
+                                  </p:stCondLst>
+                                  <p:childTnLst>
+                                    <p:set>
+                                      <p:cBhvr>
+                                        <p:cTn id="10" dur="1" fill="hold">
+                                          <p:stCondLst>
+                                            <p:cond delay="0"/>
+                                          </p:stCondLst>
+                                        </p:cTn>
+                                        <p:tgtEl>
+                                          <p:spTgt spid="5"/>
+                                        </p:tgtEl>
+                                        <p:attrNameLst>
+                                          <p:attrName>style.visibility</p:attrName>
+                                        </p:attrNameLst>
+                                      </p:cBhvr>
+                                      <p:to>
+                                        <p:strVal val="visible"/>
+                                      </p:to>
+                                    </p:set>
+                                  </p:childTnLst>
+                                </p:cTn>
+                              </p:par>
+                            </p:childTnLst>
+                          </p:cTn>
+                        </p:par>
+                        <p:par>
+                          <p:cTn id="11" fill="hold">
+                            <p:stCondLst>
+                              <p:cond delay="0"/>
+                            </p:stCondLst>
+                            <p:childTnLst>
+                              <p:par>
+                                <p:cTn id="12" presetID="1" presetClass="entr" presetSubtype="0" fill="hold" grpId="0" nodeType="afterEffect">
+                                  <p:stCondLst>
+                                    <p:cond delay="0"/>
+                                  </p:stCondLst>
+                                  <p:childTnLst>
+                                    <p:set>
+                                      <p:cBhvr>
+                                        <p:cTn id="13" dur="1" fill="hold">
+                                          <p:stCondLst>
+                                            <p:cond delay="0"/>
+                                          </p:stCondLst>
+                                        </p:cTn>
+                                        <p:tgtEl>
+                                          <p:spTgt spid="3">
+                                            <p:txEl>
+                                              <p:pRg st="0" end="0"/>
+                                            </p:txEl>
+                                          </p:spTgt>
+                                        </p:tgtEl>
+                                        <p:attrNameLst>
+                                          <p:attrName>style.visibility</p:attrName>
+                                        </p:attrNameLst>
+                                      </p:cBhvr>
+                                      <p:to>
+                                        <p:strVal val="visible"/>
+                                      </p:to>
+                                    </p:set>
+                                  </p:childTnLst>
+                                </p:cTn>
+                              </p:par>
+                            </p:childTnLst>
+                          </p:cTn>
+                        </p:par>
+                        <p:par>
+                          <p:cTn id="14" fill="hold">
+                            <p:stCondLst>
+                              <p:cond delay="0"/>
+                            </p:stCondLst>
+                            <p:childTnLst>
+                              <p:par>
+                                <p:cTn id="15" presetID="1" presetClass="entr" presetSubtype="0" fill="hold" grpId="0" nodeType="afterEffect">
+                                  <p:stCondLst>
+                                    <p:cond delay="0"/>
+                                  </p:stCondLst>
+                                  <p:childTnLst>
+                                    <p:set>
+                                      <p:cBhvr>
+                                        <p:cTn id="16" dur="1" fill="hold">
+                                          <p:stCondLst>
+                                            <p:cond delay="0"/>
+                                          </p:stCondLst>
+                                        </p:cTn>
+                                        <p:tgtEl>
+                                          <p:spTgt spid="3">
+                                            <p:txEl>
+                                              <p:pRg st="1" end="1"/>
+                                            </p:txEl>
+                                          </p:spTgt>
+                                        </p:tgtEl>
+                                        <p:attrNameLst>
+                                          <p:attrName>style.visibility</p:attrName>
+                                        </p:attrNameLst>
+                                      </p:cBhvr>
+                                      <p:to>
+                                        <p:strVal val="visible"/>
+                                      </p:to>
+                                    </p:set>
+                                  </p:childTnLst>
+                                </p:cTn>
+                              </p:par>
+                            </p:childTnLst>
+                          </p:cTn>
+                        </p:par>
+                        <p:par>
+                          <p:cTn id="17" fill="hold">
+                            <p:stCondLst>
+                              <p:cond delay="0"/>
+                            </p:stCondLst>
+                            <p:childTnLst>
+                              <p:par>
+                                <p:cTn id="18" presetID="1" presetClass="entr" presetSubtype="0" fill="hold" grpId="0" nodeType="afterEffect">
+                                  <p:stCondLst>
+                                    <p:cond delay="0"/>
+                                  </p:stCondLst>
+                                  <p:childTnLst>
+                                    <p:set>
+                                      <p:cBhvr>
+                                        <p:cTn id="19" dur="1" fill="hold">
+                                          <p:stCondLst>
+                                            <p:cond delay="0"/>
+                                          </p:stCondLst>
+                                        </p:cTn>
+                                        <p:tgtEl>
+                                          <p:spTgt spid="3">
+                                            <p:txEl>
+                                              <p:pRg st="2" end="2"/>
+                                            </p:txEl>
+                                          </p:spTgt>
+                                        </p:tgtEl>
+                                        <p:attrNameLst>
+                                          <p:attrName>style.visibility</p:attrName>
+                                        </p:attrNameLst>
+                                      </p:cBhvr>
+                                      <p:to>
+                                        <p:strVal val="visible"/>
+                                      </p:to>
+                                    </p:set>
+                                  </p:childTnLst>
+                                </p:cTn>
+                              </p:par>
+                            </p:childTnLst>
+                          </p:cTn>
+                        </p:par>
+                        <p:par>
+                          <p:cTn id="20" fill="hold">
+                            <p:stCondLst>
+                              <p:cond delay="0"/>
+                            </p:stCondLst>
+                            <p:childTnLst>
+                              <p:par>
+                                <p:cTn id="21" presetID="1" presetClass="entr" presetSubtype="0" fill="hold" grpId="0" nodeType="afterEffect">
+                                  <p:stCondLst>
+                                    <p:cond delay="0"/>
+                                  </p:stCondLst>
+                                  <p:childTnLst>
+                                    <p:set>
+                                      <p:cBhvr>
+                                        <p:cTn id="22" dur="1" fill="hold">
+                                          <p:stCondLst>
+                                            <p:cond delay="0"/>
+                                          </p:stCondLst>
+                                        </p:cTn>
+                                        <p:tgtEl>
+                                          <p:spTgt spid="3">
+                                            <p:txEl>
+                                              <p:pRg st="3" end="3"/>
+                                            </p:txEl>
+                                          </p:spTgt>
+                                        </p:tgtEl>
+                                        <p:attrNameLst>
+                                          <p:attrName>style.visibility</p:attrName>
+                                        </p:attrNameLst>
+                                      </p:cBhvr>
+                                      <p:to>
+                                        <p:strVal val="visible"/>
+                                      </p:to>
+                                    </p:set>
+                                  </p:childTnLst>
+                                </p:cTn>
+                              </p:par>
+                            </p:childTnLst>
+                          </p:cTn>
+                        </p:par>
+                        <p:par>
+                          <p:cTn id="23" fill="hold">
+                            <p:stCondLst>
+                              <p:cond delay="0"/>
+                            </p:stCondLst>
+                            <p:childTnLst>
+                              <p:par>
+                                <p:cTn id="24" presetID="1" presetClass="entr" presetSubtype="0" fill="hold" grpId="0" nodeType="afterEffect">
+                                  <p:stCondLst>
+                                    <p:cond delay="0"/>
+                                  </p:stCondLst>
+                                  <p:childTnLst>
+                                    <p:set>
+                                      <p:cBhvr>
+                                        <p:cTn id="25" dur="1" fill="hold">
+                                          <p:stCondLst>
+                                            <p:cond delay="0"/>
+                                          </p:stCondLst>
+                                        </p:cTn>
+                                        <p:tgtEl>
+                                          <p:spTgt spid="3">
+                                            <p:txEl>
+                                              <p:pRg st="4" end="4"/>
+                                            </p:txEl>
+                                          </p:spTgt>
+                                        </p:tgtEl>
+                                        <p:attrNameLst>
+                                          <p:attrName>style.visibility</p:attrName>
+                                        </p:attrNameLst>
+                                      </p:cBhvr>
+                                      <p:to>
+                                        <p:strVal val="visible"/>
+                                      </p:to>
+                                    </p:set>
+                                  </p:childTnLst>
+                                </p:cTn>
+                              </p:par>
+                            </p:childTnLst>
+                          </p:cTn>
+                        </p:par>
+                      </p:childTnLst>
+                    </p:cTn>
+                  </p:par>
+                </p:childTnLst>
+              </p:cTn>
+              <p:prevCondLst>
+                <p:cond evt="onPrev" delay="0">
+                  <p:tgtEl>
+                    <p:sldTgt/>
+                  </p:tgtEl>
+                </p:cond>
+              </p:prevCondLst>
+              <p:nextCondLst>
+                <p:cond evt="onNext" delay="0">
+                  <p:tgtEl>
+                    <p:sldTgt/>
+                  </p:tgtEl>
+                </p:cond>
+              </p:nextCondLst>
+            </p:seq>
+          </p:childTnLst>
+        </p:cTn>
+      </p:par>
+    </p:tnLst>
+    <p:bldLst>
+      <p:bldP spid="2" grpId="0"/>
+      <p:bldP spid="3" grpId="0" uiExpand="1" build="p"/>
+    </p:bldLst>
+  </p:timing>
 </p:sld>
 </file>
 
@@ -5521,6 +10310,36 @@
           <a:chExt cx="0" cy="0"/>
         </a:xfrm>
       </p:grpSpPr>
+      <p:pic>
+        <p:nvPicPr>
+          <p:cNvPr id="5" name="Grafik 4">
+            <a:extLst>
+              <a:ext uri="{FF2B5EF4-FFF2-40B4-BE49-F238E27FC236}">
+                <a16:creationId xmlns:a16="http://schemas.microsoft.com/office/drawing/2014/main" id="{86FF7E4E-B1A4-4D25-8DDC-4545FF84818D}"/>
+              </a:ext>
+            </a:extLst>
+          </p:cNvPr>
+          <p:cNvPicPr>
+            <a:picLocks noChangeAspect="1"/>
+          </p:cNvPicPr>
+          <p:nvPr/>
+        </p:nvPicPr>
+        <p:blipFill>
+          <a:blip r:embed="rId2"/>
+          <a:stretch>
+            <a:fillRect/>
+          </a:stretch>
+        </p:blipFill>
+        <p:spPr>
+          <a:xfrm>
+            <a:off x="2522361" y="900483"/>
+            <a:ext cx="9669640" cy="5173058"/>
+          </a:xfrm>
+          <a:prstGeom prst="rect">
+            <a:avLst/>
+          </a:prstGeom>
+        </p:spPr>
+      </p:pic>
       <p:sp>
         <p:nvSpPr>
           <p:cNvPr id="2" name="Titel 1">
@@ -5579,36 +10398,6 @@
           </a:p>
         </p:txBody>
       </p:sp>
-      <p:pic>
-        <p:nvPicPr>
-          <p:cNvPr id="6" name="Grafik 5">
-            <a:extLst>
-              <a:ext uri="{FF2B5EF4-FFF2-40B4-BE49-F238E27FC236}">
-                <a16:creationId xmlns:a16="http://schemas.microsoft.com/office/drawing/2014/main" id="{D5573D5D-DE6A-4CCE-8153-AB9EF0D9C5B3}"/>
-              </a:ext>
-            </a:extLst>
-          </p:cNvPr>
-          <p:cNvPicPr>
-            <a:picLocks noChangeAspect="1"/>
-          </p:cNvPicPr>
-          <p:nvPr/>
-        </p:nvPicPr>
-        <p:blipFill>
-          <a:blip r:embed="rId2"/>
-          <a:stretch>
-            <a:fillRect/>
-          </a:stretch>
-        </p:blipFill>
-        <p:spPr>
-          <a:xfrm>
-            <a:off x="3515306" y="900483"/>
-            <a:ext cx="8676694" cy="4734437"/>
-          </a:xfrm>
-          <a:prstGeom prst="rect">
-            <a:avLst/>
-          </a:prstGeom>
-        </p:spPr>
-      </p:pic>
       <p:sp>
         <p:nvSpPr>
           <p:cNvPr id="8" name="Inhaltsplatzhalter 2">
@@ -5671,6 +10460,250 @@
   <p:clrMapOvr>
     <a:masterClrMapping/>
   </p:clrMapOvr>
+  <p:timing>
+    <p:tnLst>
+      <p:par>
+        <p:cTn id="1" dur="indefinite" restart="never" nodeType="tmRoot">
+          <p:childTnLst>
+            <p:seq concurrent="1" nextAc="seek">
+              <p:cTn id="2" dur="indefinite" nodeType="mainSeq">
+                <p:childTnLst>
+                  <p:par>
+                    <p:cTn id="3" fill="hold">
+                      <p:stCondLst>
+                        <p:cond delay="indefinite"/>
+                      </p:stCondLst>
+                      <p:childTnLst>
+                        <p:par>
+                          <p:cTn id="4" fill="hold">
+                            <p:stCondLst>
+                              <p:cond delay="0"/>
+                            </p:stCondLst>
+                            <p:childTnLst>
+                              <p:par>
+                                <p:cTn id="5" presetID="1" presetClass="entr" presetSubtype="0" fill="hold" grpId="0" nodeType="clickEffect">
+                                  <p:stCondLst>
+                                    <p:cond delay="0"/>
+                                  </p:stCondLst>
+                                  <p:childTnLst>
+                                    <p:set>
+                                      <p:cBhvr>
+                                        <p:cTn id="6" dur="1" fill="hold">
+                                          <p:stCondLst>
+                                            <p:cond delay="0"/>
+                                          </p:stCondLst>
+                                        </p:cTn>
+                                        <p:tgtEl>
+                                          <p:spTgt spid="2"/>
+                                        </p:tgtEl>
+                                        <p:attrNameLst>
+                                          <p:attrName>style.visibility</p:attrName>
+                                        </p:attrNameLst>
+                                      </p:cBhvr>
+                                      <p:to>
+                                        <p:strVal val="visible"/>
+                                      </p:to>
+                                    </p:set>
+                                  </p:childTnLst>
+                                </p:cTn>
+                              </p:par>
+                            </p:childTnLst>
+                          </p:cTn>
+                        </p:par>
+                      </p:childTnLst>
+                    </p:cTn>
+                  </p:par>
+                  <p:par>
+                    <p:cTn id="7" fill="hold">
+                      <p:stCondLst>
+                        <p:cond delay="indefinite"/>
+                      </p:stCondLst>
+                      <p:childTnLst>
+                        <p:par>
+                          <p:cTn id="8" fill="hold">
+                            <p:stCondLst>
+                              <p:cond delay="0"/>
+                            </p:stCondLst>
+                            <p:childTnLst>
+                              <p:par>
+                                <p:cTn id="9" presetID="1" presetClass="entr" presetSubtype="0" fill="hold" nodeType="clickEffect">
+                                  <p:stCondLst>
+                                    <p:cond delay="0"/>
+                                  </p:stCondLst>
+                                  <p:childTnLst>
+                                    <p:set>
+                                      <p:cBhvr>
+                                        <p:cTn id="10" dur="1" fill="hold">
+                                          <p:stCondLst>
+                                            <p:cond delay="0"/>
+                                          </p:stCondLst>
+                                        </p:cTn>
+                                        <p:tgtEl>
+                                          <p:spTgt spid="5"/>
+                                        </p:tgtEl>
+                                        <p:attrNameLst>
+                                          <p:attrName>style.visibility</p:attrName>
+                                        </p:attrNameLst>
+                                      </p:cBhvr>
+                                      <p:to>
+                                        <p:strVal val="visible"/>
+                                      </p:to>
+                                    </p:set>
+                                  </p:childTnLst>
+                                </p:cTn>
+                              </p:par>
+                            </p:childTnLst>
+                          </p:cTn>
+                        </p:par>
+                        <p:par>
+                          <p:cTn id="11" fill="hold">
+                            <p:stCondLst>
+                              <p:cond delay="0"/>
+                            </p:stCondLst>
+                            <p:childTnLst>
+                              <p:par>
+                                <p:cTn id="12" presetID="1" presetClass="entr" presetSubtype="0" fill="hold" grpId="0" nodeType="afterEffect">
+                                  <p:stCondLst>
+                                    <p:cond delay="0"/>
+                                  </p:stCondLst>
+                                  <p:childTnLst>
+                                    <p:set>
+                                      <p:cBhvr>
+                                        <p:cTn id="13" dur="1" fill="hold">
+                                          <p:stCondLst>
+                                            <p:cond delay="0"/>
+                                          </p:stCondLst>
+                                        </p:cTn>
+                                        <p:tgtEl>
+                                          <p:spTgt spid="8">
+                                            <p:txEl>
+                                              <p:pRg st="0" end="0"/>
+                                            </p:txEl>
+                                          </p:spTgt>
+                                        </p:tgtEl>
+                                        <p:attrNameLst>
+                                          <p:attrName>style.visibility</p:attrName>
+                                        </p:attrNameLst>
+                                      </p:cBhvr>
+                                      <p:to>
+                                        <p:strVal val="visible"/>
+                                      </p:to>
+                                    </p:set>
+                                  </p:childTnLst>
+                                </p:cTn>
+                              </p:par>
+                            </p:childTnLst>
+                          </p:cTn>
+                        </p:par>
+                        <p:par>
+                          <p:cTn id="14" fill="hold">
+                            <p:stCondLst>
+                              <p:cond delay="0"/>
+                            </p:stCondLst>
+                            <p:childTnLst>
+                              <p:par>
+                                <p:cTn id="15" presetID="1" presetClass="entr" presetSubtype="0" fill="hold" grpId="0" nodeType="afterEffect">
+                                  <p:stCondLst>
+                                    <p:cond delay="0"/>
+                                  </p:stCondLst>
+                                  <p:childTnLst>
+                                    <p:set>
+                                      <p:cBhvr>
+                                        <p:cTn id="16" dur="1" fill="hold">
+                                          <p:stCondLst>
+                                            <p:cond delay="0"/>
+                                          </p:stCondLst>
+                                        </p:cTn>
+                                        <p:tgtEl>
+                                          <p:spTgt spid="8">
+                                            <p:txEl>
+                                              <p:pRg st="1" end="1"/>
+                                            </p:txEl>
+                                          </p:spTgt>
+                                        </p:tgtEl>
+                                        <p:attrNameLst>
+                                          <p:attrName>style.visibility</p:attrName>
+                                        </p:attrNameLst>
+                                      </p:cBhvr>
+                                      <p:to>
+                                        <p:strVal val="visible"/>
+                                      </p:to>
+                                    </p:set>
+                                  </p:childTnLst>
+                                </p:cTn>
+                              </p:par>
+                            </p:childTnLst>
+                          </p:cTn>
+                        </p:par>
+                        <p:par>
+                          <p:cTn id="17" fill="hold">
+                            <p:stCondLst>
+                              <p:cond delay="0"/>
+                            </p:stCondLst>
+                            <p:childTnLst>
+                              <p:par>
+                                <p:cTn id="18" presetID="1" presetClass="entr" presetSubtype="0" fill="hold" grpId="0" nodeType="afterEffect">
+                                  <p:stCondLst>
+                                    <p:cond delay="0"/>
+                                  </p:stCondLst>
+                                  <p:childTnLst>
+                                    <p:set>
+                                      <p:cBhvr>
+                                        <p:cTn id="19" dur="1" fill="hold">
+                                          <p:stCondLst>
+                                            <p:cond delay="0"/>
+                                          </p:stCondLst>
+                                        </p:cTn>
+                                        <p:tgtEl>
+                                          <p:spTgt spid="8">
+                                            <p:txEl>
+                                              <p:pRg st="2" end="2"/>
+                                            </p:txEl>
+                                          </p:spTgt>
+                                        </p:tgtEl>
+                                        <p:attrNameLst>
+                                          <p:attrName>style.visibility</p:attrName>
+                                        </p:attrNameLst>
+                                      </p:cBhvr>
+                                      <p:to>
+                                        <p:strVal val="visible"/>
+                                      </p:to>
+                                    </p:set>
+                                  </p:childTnLst>
+                                </p:cTn>
+                              </p:par>
+                            </p:childTnLst>
+                          </p:cTn>
+                        </p:par>
+                      </p:childTnLst>
+                    </p:cTn>
+                  </p:par>
+                </p:childTnLst>
+              </p:cTn>
+              <p:prevCondLst>
+                <p:cond evt="onPrev" delay="0">
+                  <p:tgtEl>
+                    <p:sldTgt/>
+                  </p:tgtEl>
+                </p:cond>
+              </p:prevCondLst>
+              <p:nextCondLst>
+                <p:cond evt="onNext" delay="0">
+                  <p:tgtEl>
+                    <p:sldTgt/>
+                  </p:tgtEl>
+                </p:cond>
+              </p:nextCondLst>
+            </p:seq>
+          </p:childTnLst>
+        </p:cTn>
+      </p:par>
+    </p:tnLst>
+    <p:bldLst>
+      <p:bldP spid="2" grpId="0"/>
+      <p:bldP spid="8" grpId="0" uiExpand="1" build="p"/>
+    </p:bldLst>
+  </p:timing>
 </p:sld>
 </file>
 
@@ -5850,6 +10883,281 @@
   <p:clrMapOvr>
     <a:masterClrMapping/>
   </p:clrMapOvr>
+  <p:timing>
+    <p:tnLst>
+      <p:par>
+        <p:cTn id="1" dur="indefinite" restart="never" nodeType="tmRoot">
+          <p:childTnLst>
+            <p:seq concurrent="1" nextAc="seek">
+              <p:cTn id="2" dur="indefinite" nodeType="mainSeq">
+                <p:childTnLst>
+                  <p:par>
+                    <p:cTn id="3" fill="hold">
+                      <p:stCondLst>
+                        <p:cond delay="indefinite"/>
+                      </p:stCondLst>
+                      <p:childTnLst>
+                        <p:par>
+                          <p:cTn id="4" fill="hold">
+                            <p:stCondLst>
+                              <p:cond delay="0"/>
+                            </p:stCondLst>
+                            <p:childTnLst>
+                              <p:par>
+                                <p:cTn id="5" presetID="1" presetClass="entr" presetSubtype="0" fill="hold" grpId="0" nodeType="clickEffect">
+                                  <p:stCondLst>
+                                    <p:cond delay="0"/>
+                                  </p:stCondLst>
+                                  <p:childTnLst>
+                                    <p:set>
+                                      <p:cBhvr>
+                                        <p:cTn id="6" dur="1" fill="hold">
+                                          <p:stCondLst>
+                                            <p:cond delay="0"/>
+                                          </p:stCondLst>
+                                        </p:cTn>
+                                        <p:tgtEl>
+                                          <p:spTgt spid="2"/>
+                                        </p:tgtEl>
+                                        <p:attrNameLst>
+                                          <p:attrName>style.visibility</p:attrName>
+                                        </p:attrNameLst>
+                                      </p:cBhvr>
+                                      <p:to>
+                                        <p:strVal val="visible"/>
+                                      </p:to>
+                                    </p:set>
+                                  </p:childTnLst>
+                                </p:cTn>
+                              </p:par>
+                            </p:childTnLst>
+                          </p:cTn>
+                        </p:par>
+                        <p:par>
+                          <p:cTn id="7" fill="hold">
+                            <p:stCondLst>
+                              <p:cond delay="0"/>
+                            </p:stCondLst>
+                            <p:childTnLst>
+                              <p:par>
+                                <p:cTn id="8" presetID="1" presetClass="entr" presetSubtype="0" fill="hold" nodeType="afterEffect">
+                                  <p:stCondLst>
+                                    <p:cond delay="0"/>
+                                  </p:stCondLst>
+                                  <p:childTnLst>
+                                    <p:set>
+                                      <p:cBhvr>
+                                        <p:cTn id="9" dur="1" fill="hold">
+                                          <p:stCondLst>
+                                            <p:cond delay="0"/>
+                                          </p:stCondLst>
+                                        </p:cTn>
+                                        <p:tgtEl>
+                                          <p:spTgt spid="6"/>
+                                        </p:tgtEl>
+                                        <p:attrNameLst>
+                                          <p:attrName>style.visibility</p:attrName>
+                                        </p:attrNameLst>
+                                      </p:cBhvr>
+                                      <p:to>
+                                        <p:strVal val="visible"/>
+                                      </p:to>
+                                    </p:set>
+                                  </p:childTnLst>
+                                </p:cTn>
+                              </p:par>
+                            </p:childTnLst>
+                          </p:cTn>
+                        </p:par>
+                        <p:par>
+                          <p:cTn id="10" fill="hold">
+                            <p:stCondLst>
+                              <p:cond delay="0"/>
+                            </p:stCondLst>
+                            <p:childTnLst>
+                              <p:par>
+                                <p:cTn id="11" presetID="1" presetClass="entr" presetSubtype="0" fill="hold" grpId="0" nodeType="afterEffect">
+                                  <p:stCondLst>
+                                    <p:cond delay="0"/>
+                                  </p:stCondLst>
+                                  <p:childTnLst>
+                                    <p:set>
+                                      <p:cBhvr>
+                                        <p:cTn id="12" dur="1" fill="hold">
+                                          <p:stCondLst>
+                                            <p:cond delay="0"/>
+                                          </p:stCondLst>
+                                        </p:cTn>
+                                        <p:tgtEl>
+                                          <p:spTgt spid="10">
+                                            <p:txEl>
+                                              <p:pRg st="0" end="0"/>
+                                            </p:txEl>
+                                          </p:spTgt>
+                                        </p:tgtEl>
+                                        <p:attrNameLst>
+                                          <p:attrName>style.visibility</p:attrName>
+                                        </p:attrNameLst>
+                                      </p:cBhvr>
+                                      <p:to>
+                                        <p:strVal val="visible"/>
+                                      </p:to>
+                                    </p:set>
+                                  </p:childTnLst>
+                                </p:cTn>
+                              </p:par>
+                            </p:childTnLst>
+                          </p:cTn>
+                        </p:par>
+                        <p:par>
+                          <p:cTn id="13" fill="hold">
+                            <p:stCondLst>
+                              <p:cond delay="0"/>
+                            </p:stCondLst>
+                            <p:childTnLst>
+                              <p:par>
+                                <p:cTn id="14" presetID="1" presetClass="entr" presetSubtype="0" fill="hold" grpId="0" nodeType="afterEffect">
+                                  <p:stCondLst>
+                                    <p:cond delay="0"/>
+                                  </p:stCondLst>
+                                  <p:childTnLst>
+                                    <p:set>
+                                      <p:cBhvr>
+                                        <p:cTn id="15" dur="1" fill="hold">
+                                          <p:stCondLst>
+                                            <p:cond delay="0"/>
+                                          </p:stCondLst>
+                                        </p:cTn>
+                                        <p:tgtEl>
+                                          <p:spTgt spid="10">
+                                            <p:txEl>
+                                              <p:pRg st="1" end="1"/>
+                                            </p:txEl>
+                                          </p:spTgt>
+                                        </p:tgtEl>
+                                        <p:attrNameLst>
+                                          <p:attrName>style.visibility</p:attrName>
+                                        </p:attrNameLst>
+                                      </p:cBhvr>
+                                      <p:to>
+                                        <p:strVal val="visible"/>
+                                      </p:to>
+                                    </p:set>
+                                  </p:childTnLst>
+                                </p:cTn>
+                              </p:par>
+                            </p:childTnLst>
+                          </p:cTn>
+                        </p:par>
+                        <p:par>
+                          <p:cTn id="16" fill="hold">
+                            <p:stCondLst>
+                              <p:cond delay="0"/>
+                            </p:stCondLst>
+                            <p:childTnLst>
+                              <p:par>
+                                <p:cTn id="17" presetID="1" presetClass="entr" presetSubtype="0" fill="hold" grpId="0" nodeType="afterEffect">
+                                  <p:stCondLst>
+                                    <p:cond delay="0"/>
+                                  </p:stCondLst>
+                                  <p:childTnLst>
+                                    <p:set>
+                                      <p:cBhvr>
+                                        <p:cTn id="18" dur="1" fill="hold">
+                                          <p:stCondLst>
+                                            <p:cond delay="0"/>
+                                          </p:stCondLst>
+                                        </p:cTn>
+                                        <p:tgtEl>
+                                          <p:spTgt spid="10">
+                                            <p:txEl>
+                                              <p:pRg st="2" end="2"/>
+                                            </p:txEl>
+                                          </p:spTgt>
+                                        </p:tgtEl>
+                                        <p:attrNameLst>
+                                          <p:attrName>style.visibility</p:attrName>
+                                        </p:attrNameLst>
+                                      </p:cBhvr>
+                                      <p:to>
+                                        <p:strVal val="visible"/>
+                                      </p:to>
+                                    </p:set>
+                                  </p:childTnLst>
+                                </p:cTn>
+                              </p:par>
+                            </p:childTnLst>
+                          </p:cTn>
+                        </p:par>
+                        <p:par>
+                          <p:cTn id="19" fill="hold">
+                            <p:stCondLst>
+                              <p:cond delay="0"/>
+                            </p:stCondLst>
+                            <p:childTnLst>
+                              <p:par>
+                                <p:cTn id="20" presetID="1" presetClass="entr" presetSubtype="0" fill="hold" grpId="0" nodeType="afterEffect">
+                                  <p:stCondLst>
+                                    <p:cond delay="0"/>
+                                  </p:stCondLst>
+                                  <p:childTnLst>
+                                    <p:set>
+                                      <p:cBhvr>
+                                        <p:cTn id="21" dur="1" fill="hold">
+                                          <p:stCondLst>
+                                            <p:cond delay="0"/>
+                                          </p:stCondLst>
+                                        </p:cTn>
+                                        <p:tgtEl>
+                                          <p:spTgt spid="10">
+                                            <p:txEl>
+                                              <p:pRg st="3" end="3"/>
+                                            </p:txEl>
+                                          </p:spTgt>
+                                        </p:tgtEl>
+                                        <p:attrNameLst>
+                                          <p:attrName>style.visibility</p:attrName>
+                                        </p:attrNameLst>
+                                      </p:cBhvr>
+                                      <p:to>
+                                        <p:strVal val="visible"/>
+                                      </p:to>
+                                    </p:set>
+                                  </p:childTnLst>
+                                </p:cTn>
+                              </p:par>
+                            </p:childTnLst>
+                          </p:cTn>
+                        </p:par>
+                      </p:childTnLst>
+                    </p:cTn>
+                  </p:par>
+                </p:childTnLst>
+              </p:cTn>
+              <p:prevCondLst>
+                <p:cond evt="onPrev" delay="0">
+                  <p:tgtEl>
+                    <p:sldTgt/>
+                  </p:tgtEl>
+                </p:cond>
+              </p:prevCondLst>
+              <p:nextCondLst>
+                <p:cond evt="onNext" delay="0">
+                  <p:tgtEl>
+                    <p:sldTgt/>
+                  </p:tgtEl>
+                </p:cond>
+              </p:nextCondLst>
+            </p:seq>
+          </p:childTnLst>
+        </p:cTn>
+      </p:par>
+    </p:tnLst>
+    <p:bldLst>
+      <p:bldP spid="2" grpId="0"/>
+      <p:bldP spid="10" grpId="0" uiExpand="1" build="p"/>
+    </p:bldLst>
+  </p:timing>
 </p:sld>
 </file>
 
@@ -6038,6 +11346,321 @@
   <p:clrMapOvr>
     <a:masterClrMapping/>
   </p:clrMapOvr>
+  <p:timing>
+    <p:tnLst>
+      <p:par>
+        <p:cTn id="1" dur="indefinite" restart="never" nodeType="tmRoot">
+          <p:childTnLst>
+            <p:seq concurrent="1" nextAc="seek">
+              <p:cTn id="2" dur="indefinite" nodeType="mainSeq">
+                <p:childTnLst>
+                  <p:par>
+                    <p:cTn id="3" fill="hold">
+                      <p:stCondLst>
+                        <p:cond delay="indefinite"/>
+                      </p:stCondLst>
+                      <p:childTnLst>
+                        <p:par>
+                          <p:cTn id="4" fill="hold">
+                            <p:stCondLst>
+                              <p:cond delay="0"/>
+                            </p:stCondLst>
+                            <p:childTnLst>
+                              <p:par>
+                                <p:cTn id="5" presetID="1" presetClass="entr" presetSubtype="0" fill="hold" grpId="0" nodeType="clickEffect">
+                                  <p:stCondLst>
+                                    <p:cond delay="0"/>
+                                  </p:stCondLst>
+                                  <p:childTnLst>
+                                    <p:set>
+                                      <p:cBhvr>
+                                        <p:cTn id="6" dur="1" fill="hold">
+                                          <p:stCondLst>
+                                            <p:cond delay="0"/>
+                                          </p:stCondLst>
+                                        </p:cTn>
+                                        <p:tgtEl>
+                                          <p:spTgt spid="2"/>
+                                        </p:tgtEl>
+                                        <p:attrNameLst>
+                                          <p:attrName>style.visibility</p:attrName>
+                                        </p:attrNameLst>
+                                      </p:cBhvr>
+                                      <p:to>
+                                        <p:strVal val="visible"/>
+                                      </p:to>
+                                    </p:set>
+                                  </p:childTnLst>
+                                </p:cTn>
+                              </p:par>
+                            </p:childTnLst>
+                          </p:cTn>
+                        </p:par>
+                        <p:par>
+                          <p:cTn id="7" fill="hold">
+                            <p:stCondLst>
+                              <p:cond delay="0"/>
+                            </p:stCondLst>
+                            <p:childTnLst>
+                              <p:par>
+                                <p:cTn id="8" presetID="1" presetClass="entr" presetSubtype="0" fill="hold" nodeType="afterEffect">
+                                  <p:stCondLst>
+                                    <p:cond delay="0"/>
+                                  </p:stCondLst>
+                                  <p:childTnLst>
+                                    <p:set>
+                                      <p:cBhvr>
+                                        <p:cTn id="9" dur="1" fill="hold">
+                                          <p:stCondLst>
+                                            <p:cond delay="0"/>
+                                          </p:stCondLst>
+                                        </p:cTn>
+                                        <p:tgtEl>
+                                          <p:spTgt spid="5"/>
+                                        </p:tgtEl>
+                                        <p:attrNameLst>
+                                          <p:attrName>style.visibility</p:attrName>
+                                        </p:attrNameLst>
+                                      </p:cBhvr>
+                                      <p:to>
+                                        <p:strVal val="visible"/>
+                                      </p:to>
+                                    </p:set>
+                                  </p:childTnLst>
+                                </p:cTn>
+                              </p:par>
+                            </p:childTnLst>
+                          </p:cTn>
+                        </p:par>
+                        <p:par>
+                          <p:cTn id="10" fill="hold">
+                            <p:stCondLst>
+                              <p:cond delay="0"/>
+                            </p:stCondLst>
+                            <p:childTnLst>
+                              <p:par>
+                                <p:cTn id="11" presetID="1" presetClass="entr" presetSubtype="0" fill="hold" grpId="0" nodeType="afterEffect">
+                                  <p:stCondLst>
+                                    <p:cond delay="0"/>
+                                  </p:stCondLst>
+                                  <p:childTnLst>
+                                    <p:set>
+                                      <p:cBhvr>
+                                        <p:cTn id="12" dur="1" fill="hold">
+                                          <p:stCondLst>
+                                            <p:cond delay="0"/>
+                                          </p:stCondLst>
+                                        </p:cTn>
+                                        <p:tgtEl>
+                                          <p:spTgt spid="6">
+                                            <p:txEl>
+                                              <p:pRg st="0" end="0"/>
+                                            </p:txEl>
+                                          </p:spTgt>
+                                        </p:tgtEl>
+                                        <p:attrNameLst>
+                                          <p:attrName>style.visibility</p:attrName>
+                                        </p:attrNameLst>
+                                      </p:cBhvr>
+                                      <p:to>
+                                        <p:strVal val="visible"/>
+                                      </p:to>
+                                    </p:set>
+                                  </p:childTnLst>
+                                </p:cTn>
+                              </p:par>
+                            </p:childTnLst>
+                          </p:cTn>
+                        </p:par>
+                        <p:par>
+                          <p:cTn id="13" fill="hold">
+                            <p:stCondLst>
+                              <p:cond delay="0"/>
+                            </p:stCondLst>
+                            <p:childTnLst>
+                              <p:par>
+                                <p:cTn id="14" presetID="1" presetClass="entr" presetSubtype="0" fill="hold" grpId="0" nodeType="afterEffect">
+                                  <p:stCondLst>
+                                    <p:cond delay="0"/>
+                                  </p:stCondLst>
+                                  <p:childTnLst>
+                                    <p:set>
+                                      <p:cBhvr>
+                                        <p:cTn id="15" dur="1" fill="hold">
+                                          <p:stCondLst>
+                                            <p:cond delay="0"/>
+                                          </p:stCondLst>
+                                        </p:cTn>
+                                        <p:tgtEl>
+                                          <p:spTgt spid="6">
+                                            <p:txEl>
+                                              <p:pRg st="1" end="1"/>
+                                            </p:txEl>
+                                          </p:spTgt>
+                                        </p:tgtEl>
+                                        <p:attrNameLst>
+                                          <p:attrName>style.visibility</p:attrName>
+                                        </p:attrNameLst>
+                                      </p:cBhvr>
+                                      <p:to>
+                                        <p:strVal val="visible"/>
+                                      </p:to>
+                                    </p:set>
+                                  </p:childTnLst>
+                                </p:cTn>
+                              </p:par>
+                            </p:childTnLst>
+                          </p:cTn>
+                        </p:par>
+                        <p:par>
+                          <p:cTn id="16" fill="hold">
+                            <p:stCondLst>
+                              <p:cond delay="0"/>
+                            </p:stCondLst>
+                            <p:childTnLst>
+                              <p:par>
+                                <p:cTn id="17" presetID="1" presetClass="entr" presetSubtype="0" fill="hold" grpId="0" nodeType="afterEffect">
+                                  <p:stCondLst>
+                                    <p:cond delay="0"/>
+                                  </p:stCondLst>
+                                  <p:childTnLst>
+                                    <p:set>
+                                      <p:cBhvr>
+                                        <p:cTn id="18" dur="1" fill="hold">
+                                          <p:stCondLst>
+                                            <p:cond delay="0"/>
+                                          </p:stCondLst>
+                                        </p:cTn>
+                                        <p:tgtEl>
+                                          <p:spTgt spid="6">
+                                            <p:txEl>
+                                              <p:pRg st="2" end="2"/>
+                                            </p:txEl>
+                                          </p:spTgt>
+                                        </p:tgtEl>
+                                        <p:attrNameLst>
+                                          <p:attrName>style.visibility</p:attrName>
+                                        </p:attrNameLst>
+                                      </p:cBhvr>
+                                      <p:to>
+                                        <p:strVal val="visible"/>
+                                      </p:to>
+                                    </p:set>
+                                  </p:childTnLst>
+                                </p:cTn>
+                              </p:par>
+                            </p:childTnLst>
+                          </p:cTn>
+                        </p:par>
+                        <p:par>
+                          <p:cTn id="19" fill="hold">
+                            <p:stCondLst>
+                              <p:cond delay="0"/>
+                            </p:stCondLst>
+                            <p:childTnLst>
+                              <p:par>
+                                <p:cTn id="20" presetID="1" presetClass="entr" presetSubtype="0" fill="hold" grpId="0" nodeType="afterEffect">
+                                  <p:stCondLst>
+                                    <p:cond delay="0"/>
+                                  </p:stCondLst>
+                                  <p:childTnLst>
+                                    <p:set>
+                                      <p:cBhvr>
+                                        <p:cTn id="21" dur="1" fill="hold">
+                                          <p:stCondLst>
+                                            <p:cond delay="0"/>
+                                          </p:stCondLst>
+                                        </p:cTn>
+                                        <p:tgtEl>
+                                          <p:spTgt spid="6">
+                                            <p:txEl>
+                                              <p:pRg st="3" end="3"/>
+                                            </p:txEl>
+                                          </p:spTgt>
+                                        </p:tgtEl>
+                                        <p:attrNameLst>
+                                          <p:attrName>style.visibility</p:attrName>
+                                        </p:attrNameLst>
+                                      </p:cBhvr>
+                                      <p:to>
+                                        <p:strVal val="visible"/>
+                                      </p:to>
+                                    </p:set>
+                                  </p:childTnLst>
+                                </p:cTn>
+                              </p:par>
+                            </p:childTnLst>
+                          </p:cTn>
+                        </p:par>
+                        <p:par>
+                          <p:cTn id="22" fill="hold">
+                            <p:stCondLst>
+                              <p:cond delay="0"/>
+                            </p:stCondLst>
+                            <p:childTnLst>
+                              <p:par>
+                                <p:cTn id="23" presetID="1" presetClass="entr" presetSubtype="0" fill="hold" grpId="0" nodeType="afterEffect">
+                                  <p:stCondLst>
+                                    <p:cond delay="0"/>
+                                  </p:stCondLst>
+                                  <p:childTnLst>
+                                    <p:set>
+                                      <p:cBhvr>
+                                        <p:cTn id="24" dur="1" fill="hold">
+                                          <p:stCondLst>
+                                            <p:cond delay="0"/>
+                                          </p:stCondLst>
+                                        </p:cTn>
+                                        <p:tgtEl>
+                                          <p:spTgt spid="6">
+                                            <p:txEl>
+                                              <p:pRg st="4" end="4"/>
+                                            </p:txEl>
+                                          </p:spTgt>
+                                        </p:tgtEl>
+                                        <p:attrNameLst>
+                                          <p:attrName>style.visibility</p:attrName>
+                                        </p:attrNameLst>
+                                      </p:cBhvr>
+                                      <p:to>
+                                        <p:strVal val="visible"/>
+                                      </p:to>
+                                    </p:set>
+                                  </p:childTnLst>
+                                </p:cTn>
+                              </p:par>
+                            </p:childTnLst>
+                          </p:cTn>
+                        </p:par>
+                      </p:childTnLst>
+                    </p:cTn>
+                  </p:par>
+                </p:childTnLst>
+              </p:cTn>
+              <p:prevCondLst>
+                <p:cond evt="onPrev" delay="0">
+                  <p:tgtEl>
+                    <p:sldTgt/>
+                  </p:tgtEl>
+                </p:cond>
+              </p:prevCondLst>
+              <p:nextCondLst>
+                <p:cond evt="onNext" delay="0">
+                  <p:tgtEl>
+                    <p:sldTgt/>
+                  </p:tgtEl>
+                </p:cond>
+              </p:nextCondLst>
+            </p:seq>
+          </p:childTnLst>
+        </p:cTn>
+      </p:par>
+    </p:tnLst>
+    <p:bldLst>
+      <p:bldP spid="2" grpId="0"/>
+      <p:bldP spid="6" grpId="0" uiExpand="1" build="p"/>
+    </p:bldLst>
+  </p:timing>
 </p:sld>
 </file>
 
